--- a/presentations/Sur - Board Presentation.pptx
+++ b/presentations/Sur - Board Presentation.pptx
@@ -11524,7 +11524,7 @@
                 <a:ea typeface="Calibri" pitchFamily="34" charset="-122"/>
                 <a:cs typeface="Calibri" pitchFamily="34" charset="-120"/>
               </a:rPr>
-              <a:t>◆  پرداخت کارمزد عضویت (۴٪ وثیقه) — غیرقابل‌استرداد، مستقیم به خزانه</a:t>
+              <a:t>◆  پرداخت کارمزد عضویت (۴٪ وثیقه) — غیرقابل‌استرداد، مستقیم بین ولیدیتورهای فعال تقسیم می‌شود</a:t>
             </a:r>
             <a:endParaRPr lang="en-US" sz="1400" dirty="0"/>
           </a:p>
@@ -18101,7 +18101,7 @@
                 <a:ea typeface="Calibri" pitchFamily="34" charset="-122"/>
                 <a:cs typeface="Calibri" pitchFamily="34" charset="-120"/>
               </a:rPr>
-              <a:t>توان مالی واقعی: ~۵۲.۵۶ میلیون سورن تجمعی تا سال پنجم</a:t>
+              <a:t>توان مالی واقعی: ~۴۴.۶۸ میلیون سورن تجمعی تا سال پنجم</a:t>
             </a:r>
             <a:endParaRPr lang="en-US" sz="1550" dirty="0"/>
           </a:p>
@@ -18140,7 +18140,7 @@
                 <a:ea typeface="Calibri" pitchFamily="34" charset="-122"/>
                 <a:cs typeface="Calibri" pitchFamily="34" charset="-120"/>
               </a:rPr>
-              <a:t>فقط از سهم ۵۰٪ ریوارد (~۱۰.۵ میلیون سورن در سال)، بدون احتساب کارمزد عضویت/اسلش — کافی برای پوشش کل کمبود چندساله‌ی بنیاد.</a:t>
+              <a:t>پس از کسر ۱۵٪ سهم بنیاد، (~۸.۹۴ میلیون سورن در سال)، بدون احتساب کارمزد عضویت (اکنون مستقیم بین ولیدیتورها)/اسلش — پوشش بخش بزرگی از کمبود چندساله‌ی بنیاد.</a:t>
             </a:r>
             <a:endParaRPr lang="en-US" sz="1200" dirty="0"/>
           </a:p>
@@ -21907,7 +21907,7 @@
                 <a:ea typeface="Calibri" pitchFamily="34" charset="-122"/>
                 <a:cs typeface="Calibri" pitchFamily="34" charset="-120"/>
               </a:rPr>
-              <a:t>این تابع کاملاً حذف شد. بنیاد هیچ اتصال کدی به خزانه‌ی ولیدیتورها ندارد — کاملاً ایزوله و مستقل.</a:t>
+              <a:t>بودجه‌ی کمپین همچنان بدون اتصال کدی است؛ فقط هزینه‌ی جاری بنیاد (۱۵٪ سهم ریوارد خزانه) اکنون خودکار و مستقیم منتقل می‌شود.</a:t>
             </a:r>
             <a:endParaRPr lang="en-US" sz="1300" dirty="0"/>
           </a:p>

--- a/presentations/Sur - Board Presentation.pptx
+++ b/presentations/Sur - Board Presentation.pptx
@@ -3920,6 +3920,10 @@
           </a:solidFill>
           <a:ln/>
         </p:spPr>
+        <p:txBody>
+          <a:bodyPr/>
+          <a:p/>
+        </p:txBody>
       </p:sp>
       <p:sp>
         <p:nvSpPr>
@@ -3940,6 +3944,10 @@
           </a:solidFill>
           <a:ln/>
         </p:spPr>
+        <p:txBody>
+          <a:bodyPr/>
+          <a:p/>
+        </p:txBody>
       </p:sp>
       <p:sp>
         <p:nvSpPr>
@@ -3960,6 +3968,10 @@
           </a:solidFill>
           <a:ln/>
         </p:spPr>
+        <p:txBody>
+          <a:bodyPr/>
+          <a:p/>
+        </p:txBody>
       </p:sp>
       <p:pic>
         <p:nvPicPr>
@@ -5704,6 +5716,10 @@
           </a:solidFill>
           <a:ln/>
         </p:spPr>
+        <p:txBody>
+          <a:bodyPr/>
+          <a:p/>
+        </p:txBody>
       </p:sp>
       <p:pic>
         <p:nvPicPr>
@@ -5936,6 +5952,10 @@
           </a:solidFill>
           <a:ln/>
         </p:spPr>
+        <p:txBody>
+          <a:bodyPr/>
+          <a:p/>
+        </p:txBody>
       </p:sp>
       <p:pic>
         <p:nvPicPr>
@@ -6061,6 +6081,10 @@
             <a:prstDash val="solid"/>
           </a:ln>
         </p:spPr>
+        <p:txBody>
+          <a:bodyPr/>
+          <a:p/>
+        </p:txBody>
       </p:sp>
       <p:sp>
         <p:nvSpPr>
@@ -6081,6 +6105,10 @@
           </a:solidFill>
           <a:ln/>
         </p:spPr>
+        <p:txBody>
+          <a:bodyPr/>
+          <a:p/>
+        </p:txBody>
       </p:sp>
       <p:pic>
         <p:nvPicPr>
@@ -6203,6 +6231,10 @@
           </a:solidFill>
           <a:ln/>
         </p:spPr>
+        <p:txBody>
+          <a:bodyPr/>
+          <a:p/>
+        </p:txBody>
       </p:sp>
       <p:pic>
         <p:nvPicPr>
@@ -6435,6 +6467,10 @@
           </a:solidFill>
           <a:ln/>
         </p:spPr>
+        <p:txBody>
+          <a:bodyPr/>
+          <a:p/>
+        </p:txBody>
       </p:sp>
       <p:pic>
         <p:nvPicPr>
@@ -7522,6 +7558,10 @@
           </a:solidFill>
           <a:ln/>
         </p:spPr>
+        <p:txBody>
+          <a:bodyPr/>
+          <a:p/>
+        </p:txBody>
       </p:sp>
       <p:pic>
         <p:nvPicPr>
@@ -7754,6 +7794,10 @@
           </a:solidFill>
           <a:ln/>
         </p:spPr>
+        <p:txBody>
+          <a:bodyPr/>
+          <a:p/>
+        </p:txBody>
       </p:sp>
       <p:pic>
         <p:nvPicPr>
@@ -7879,6 +7923,10 @@
             <a:prstDash val="solid"/>
           </a:ln>
         </p:spPr>
+        <p:txBody>
+          <a:bodyPr/>
+          <a:p/>
+        </p:txBody>
       </p:sp>
       <p:sp>
         <p:nvSpPr>
@@ -7899,6 +7947,10 @@
           </a:solidFill>
           <a:ln/>
         </p:spPr>
+        <p:txBody>
+          <a:bodyPr/>
+          <a:p/>
+        </p:txBody>
       </p:sp>
       <p:pic>
         <p:nvPicPr>
@@ -8024,6 +8076,10 @@
             <a:prstDash val="solid"/>
           </a:ln>
         </p:spPr>
+        <p:txBody>
+          <a:bodyPr/>
+          <a:p/>
+        </p:txBody>
       </p:sp>
       <p:sp>
         <p:nvSpPr>
@@ -8044,6 +8100,10 @@
           </a:solidFill>
           <a:ln/>
         </p:spPr>
+        <p:txBody>
+          <a:bodyPr/>
+          <a:p/>
+        </p:txBody>
       </p:sp>
       <p:pic>
         <p:nvPicPr>
@@ -8166,6 +8226,10 @@
           </a:solidFill>
           <a:ln/>
         </p:spPr>
+        <p:txBody>
+          <a:bodyPr/>
+          <a:p/>
+        </p:txBody>
       </p:sp>
       <p:pic>
         <p:nvPicPr>
@@ -8405,6 +8469,10 @@
             <a:prstDash val="solid"/>
           </a:ln>
         </p:spPr>
+        <p:txBody>
+          <a:bodyPr/>
+          <a:p/>
+        </p:txBody>
       </p:sp>
       <p:sp>
         <p:nvSpPr>
@@ -8510,6 +8578,10 @@
             <a:prstDash val="solid"/>
           </a:ln>
         </p:spPr>
+        <p:txBody>
+          <a:bodyPr/>
+          <a:p/>
+        </p:txBody>
       </p:sp>
       <p:sp>
         <p:nvSpPr>
@@ -8615,6 +8687,10 @@
             <a:prstDash val="solid"/>
           </a:ln>
         </p:spPr>
+        <p:txBody>
+          <a:bodyPr/>
+          <a:p/>
+        </p:txBody>
       </p:sp>
       <p:sp>
         <p:nvSpPr>
@@ -8752,6 +8828,10 @@
           </a:solidFill>
           <a:ln/>
         </p:spPr>
+        <p:txBody>
+          <a:bodyPr/>
+          <a:p/>
+        </p:txBody>
       </p:sp>
       <p:pic>
         <p:nvPicPr>
@@ -8984,6 +9064,10 @@
           </a:solidFill>
           <a:ln/>
         </p:spPr>
+        <p:txBody>
+          <a:bodyPr/>
+          <a:p/>
+        </p:txBody>
       </p:sp>
       <p:pic>
         <p:nvPicPr>
@@ -9028,6 +9112,10 @@
           </a:solidFill>
           <a:ln/>
         </p:spPr>
+        <p:txBody>
+          <a:bodyPr/>
+          <a:p/>
+        </p:txBody>
       </p:sp>
       <p:sp>
         <p:nvSpPr>
@@ -9168,6 +9256,10 @@
             <a:prstDash val="solid"/>
           </a:ln>
         </p:spPr>
+        <p:txBody>
+          <a:bodyPr/>
+          <a:p/>
+        </p:txBody>
       </p:sp>
       <p:sp>
         <p:nvSpPr>
@@ -9188,6 +9280,10 @@
           </a:solidFill>
           <a:ln/>
         </p:spPr>
+        <p:txBody>
+          <a:bodyPr/>
+          <a:p/>
+        </p:txBody>
       </p:sp>
       <p:pic>
         <p:nvPicPr>
@@ -9232,6 +9328,10 @@
           </a:solidFill>
           <a:ln/>
         </p:spPr>
+        <p:txBody>
+          <a:bodyPr/>
+          <a:p/>
+        </p:txBody>
       </p:sp>
       <p:sp>
         <p:nvSpPr>
@@ -9372,6 +9472,10 @@
             <a:prstDash val="solid"/>
           </a:ln>
         </p:spPr>
+        <p:txBody>
+          <a:bodyPr/>
+          <a:p/>
+        </p:txBody>
       </p:sp>
       <p:sp>
         <p:nvSpPr>
@@ -9392,6 +9496,10 @@
           </a:solidFill>
           <a:ln/>
         </p:spPr>
+        <p:txBody>
+          <a:bodyPr/>
+          <a:p/>
+        </p:txBody>
       </p:sp>
       <p:pic>
         <p:nvPicPr>
@@ -9436,6 +9544,10 @@
           </a:solidFill>
           <a:ln/>
         </p:spPr>
+        <p:txBody>
+          <a:bodyPr/>
+          <a:p/>
+        </p:txBody>
       </p:sp>
       <p:sp>
         <p:nvSpPr>
@@ -9576,6 +9688,10 @@
             <a:prstDash val="solid"/>
           </a:ln>
         </p:spPr>
+        <p:txBody>
+          <a:bodyPr/>
+          <a:p/>
+        </p:txBody>
       </p:sp>
       <p:sp>
         <p:nvSpPr>
@@ -9596,6 +9712,10 @@
           </a:solidFill>
           <a:ln/>
         </p:spPr>
+        <p:txBody>
+          <a:bodyPr/>
+          <a:p/>
+        </p:txBody>
       </p:sp>
       <p:pic>
         <p:nvPicPr>
@@ -9640,6 +9760,10 @@
           </a:solidFill>
           <a:ln/>
         </p:spPr>
+        <p:txBody>
+          <a:bodyPr/>
+          <a:p/>
+        </p:txBody>
       </p:sp>
       <p:sp>
         <p:nvSpPr>
@@ -9777,6 +9901,10 @@
           </a:solidFill>
           <a:ln/>
         </p:spPr>
+        <p:txBody>
+          <a:bodyPr/>
+          <a:p/>
+        </p:txBody>
       </p:sp>
       <p:pic>
         <p:nvPicPr>
@@ -10111,6 +10239,10 @@
           </a:solidFill>
           <a:ln/>
         </p:spPr>
+        <p:txBody>
+          <a:bodyPr/>
+          <a:p/>
+        </p:txBody>
       </p:sp>
       <p:pic>
         <p:nvPicPr>
@@ -10343,6 +10475,10 @@
           </a:solidFill>
           <a:ln/>
         </p:spPr>
+        <p:txBody>
+          <a:bodyPr/>
+          <a:p/>
+        </p:txBody>
       </p:sp>
       <p:pic>
         <p:nvPicPr>
@@ -10577,6 +10713,10 @@
           </a:solidFill>
           <a:ln/>
         </p:spPr>
+        <p:txBody>
+          <a:bodyPr/>
+          <a:p/>
+        </p:txBody>
       </p:sp>
       <p:sp>
         <p:nvSpPr>
@@ -10599,6 +10739,10 @@
           </a:solidFill>
           <a:ln/>
         </p:spPr>
+        <p:txBody>
+          <a:bodyPr/>
+          <a:p/>
+        </p:txBody>
       </p:sp>
       <p:sp>
         <p:nvSpPr>
@@ -10861,6 +11005,10 @@
           </a:solidFill>
           <a:ln/>
         </p:spPr>
+        <p:txBody>
+          <a:bodyPr/>
+          <a:p/>
+        </p:txBody>
       </p:sp>
       <p:pic>
         <p:nvPicPr>
@@ -11255,6 +11403,10 @@
           </a:solidFill>
           <a:ln/>
         </p:spPr>
+        <p:txBody>
+          <a:bodyPr/>
+          <a:p/>
+        </p:txBody>
       </p:sp>
       <p:pic>
         <p:nvPicPr>
@@ -11629,6 +11781,10 @@
           </a:solidFill>
           <a:ln/>
         </p:spPr>
+        <p:txBody>
+          <a:bodyPr/>
+          <a:p/>
+        </p:txBody>
       </p:sp>
       <p:pic>
         <p:nvPicPr>
@@ -12857,6 +13013,10 @@
           </a:solidFill>
           <a:ln/>
         </p:spPr>
+        <p:txBody>
+          <a:bodyPr/>
+          <a:p/>
+        </p:txBody>
       </p:sp>
       <p:pic>
         <p:nvPicPr>
@@ -13089,6 +13249,10 @@
           </a:solidFill>
           <a:ln/>
         </p:spPr>
+        <p:txBody>
+          <a:bodyPr/>
+          <a:p/>
+        </p:txBody>
       </p:sp>
       <p:pic>
         <p:nvPicPr>
@@ -13133,6 +13297,10 @@
           </a:solidFill>
           <a:ln/>
         </p:spPr>
+        <p:txBody>
+          <a:bodyPr/>
+          <a:p/>
+        </p:txBody>
       </p:sp>
       <p:sp>
         <p:nvSpPr>
@@ -13273,6 +13441,10 @@
             <a:prstDash val="solid"/>
           </a:ln>
         </p:spPr>
+        <p:txBody>
+          <a:bodyPr/>
+          <a:p/>
+        </p:txBody>
       </p:sp>
       <p:sp>
         <p:nvSpPr>
@@ -13293,6 +13465,10 @@
           </a:solidFill>
           <a:ln/>
         </p:spPr>
+        <p:txBody>
+          <a:bodyPr/>
+          <a:p/>
+        </p:txBody>
       </p:sp>
       <p:pic>
         <p:nvPicPr>
@@ -13337,6 +13513,10 @@
           </a:solidFill>
           <a:ln/>
         </p:spPr>
+        <p:txBody>
+          <a:bodyPr/>
+          <a:p/>
+        </p:txBody>
       </p:sp>
       <p:sp>
         <p:nvSpPr>
@@ -13477,6 +13657,10 @@
             <a:prstDash val="solid"/>
           </a:ln>
         </p:spPr>
+        <p:txBody>
+          <a:bodyPr/>
+          <a:p/>
+        </p:txBody>
       </p:sp>
       <p:sp>
         <p:nvSpPr>
@@ -13497,6 +13681,10 @@
           </a:solidFill>
           <a:ln/>
         </p:spPr>
+        <p:txBody>
+          <a:bodyPr/>
+          <a:p/>
+        </p:txBody>
       </p:sp>
       <p:pic>
         <p:nvPicPr>
@@ -13541,6 +13729,10 @@
           </a:solidFill>
           <a:ln/>
         </p:spPr>
+        <p:txBody>
+          <a:bodyPr/>
+          <a:p/>
+        </p:txBody>
       </p:sp>
       <p:sp>
         <p:nvSpPr>
@@ -13681,6 +13873,10 @@
             <a:prstDash val="solid"/>
           </a:ln>
         </p:spPr>
+        <p:txBody>
+          <a:bodyPr/>
+          <a:p/>
+        </p:txBody>
       </p:sp>
       <p:sp>
         <p:nvSpPr>
@@ -13701,6 +13897,10 @@
           </a:solidFill>
           <a:ln/>
         </p:spPr>
+        <p:txBody>
+          <a:bodyPr/>
+          <a:p/>
+        </p:txBody>
       </p:sp>
       <p:pic>
         <p:nvPicPr>
@@ -13745,6 +13945,10 @@
           </a:solidFill>
           <a:ln/>
         </p:spPr>
+        <p:txBody>
+          <a:bodyPr/>
+          <a:p/>
+        </p:txBody>
       </p:sp>
       <p:sp>
         <p:nvSpPr>
@@ -13882,6 +14086,10 @@
           </a:solidFill>
           <a:ln/>
         </p:spPr>
+        <p:txBody>
+          <a:bodyPr/>
+          <a:p/>
+        </p:txBody>
       </p:sp>
       <p:pic>
         <p:nvPicPr>
@@ -14114,6 +14322,10 @@
           </a:solidFill>
           <a:ln/>
         </p:spPr>
+        <p:txBody>
+          <a:bodyPr/>
+          <a:p/>
+        </p:txBody>
       </p:sp>
       <p:pic>
         <p:nvPicPr>
@@ -14346,6 +14558,10 @@
           </a:solidFill>
           <a:ln/>
         </p:spPr>
+        <p:txBody>
+          <a:bodyPr/>
+          <a:p/>
+        </p:txBody>
       </p:sp>
       <p:pic>
         <p:nvPicPr>
@@ -14471,6 +14687,10 @@
             <a:prstDash val="solid"/>
           </a:ln>
         </p:spPr>
+        <p:txBody>
+          <a:bodyPr/>
+          <a:p/>
+        </p:txBody>
       </p:sp>
       <p:sp>
         <p:nvSpPr>
@@ -14491,6 +14711,10 @@
           </a:solidFill>
           <a:ln/>
         </p:spPr>
+        <p:txBody>
+          <a:bodyPr/>
+          <a:p/>
+        </p:txBody>
       </p:sp>
       <p:pic>
         <p:nvPicPr>
@@ -14613,6 +14837,10 @@
           </a:solidFill>
           <a:ln/>
         </p:spPr>
+        <p:txBody>
+          <a:bodyPr/>
+          <a:p/>
+        </p:txBody>
       </p:sp>
       <p:pic>
         <p:nvPicPr>
@@ -14947,6 +15175,10 @@
           </a:solidFill>
           <a:ln/>
         </p:spPr>
+        <p:txBody>
+          <a:bodyPr/>
+          <a:p/>
+        </p:txBody>
       </p:sp>
       <p:pic>
         <p:nvPicPr>
@@ -15179,6 +15411,10 @@
           </a:solidFill>
           <a:ln/>
         </p:spPr>
+        <p:txBody>
+          <a:bodyPr/>
+          <a:p/>
+        </p:txBody>
       </p:sp>
       <p:pic>
         <p:nvPicPr>
@@ -15223,6 +15459,10 @@
           </a:solidFill>
           <a:ln/>
         </p:spPr>
+        <p:txBody>
+          <a:bodyPr/>
+          <a:p/>
+        </p:txBody>
       </p:sp>
       <p:sp>
         <p:nvSpPr>
@@ -15363,6 +15603,10 @@
             <a:prstDash val="solid"/>
           </a:ln>
         </p:spPr>
+        <p:txBody>
+          <a:bodyPr/>
+          <a:p/>
+        </p:txBody>
       </p:sp>
       <p:sp>
         <p:nvSpPr>
@@ -15383,6 +15627,10 @@
           </a:solidFill>
           <a:ln/>
         </p:spPr>
+        <p:txBody>
+          <a:bodyPr/>
+          <a:p/>
+        </p:txBody>
       </p:sp>
       <p:pic>
         <p:nvPicPr>
@@ -15427,6 +15675,10 @@
           </a:solidFill>
           <a:ln/>
         </p:spPr>
+        <p:txBody>
+          <a:bodyPr/>
+          <a:p/>
+        </p:txBody>
       </p:sp>
       <p:sp>
         <p:nvSpPr>
@@ -15567,6 +15819,10 @@
             <a:prstDash val="solid"/>
           </a:ln>
         </p:spPr>
+        <p:txBody>
+          <a:bodyPr/>
+          <a:p/>
+        </p:txBody>
       </p:sp>
       <p:sp>
         <p:nvSpPr>
@@ -15587,6 +15843,10 @@
           </a:solidFill>
           <a:ln/>
         </p:spPr>
+        <p:txBody>
+          <a:bodyPr/>
+          <a:p/>
+        </p:txBody>
       </p:sp>
       <p:pic>
         <p:nvPicPr>
@@ -15631,6 +15891,10 @@
           </a:solidFill>
           <a:ln/>
         </p:spPr>
+        <p:txBody>
+          <a:bodyPr/>
+          <a:p/>
+        </p:txBody>
       </p:sp>
       <p:sp>
         <p:nvSpPr>
@@ -15771,6 +16035,10 @@
             <a:prstDash val="solid"/>
           </a:ln>
         </p:spPr>
+        <p:txBody>
+          <a:bodyPr/>
+          <a:p/>
+        </p:txBody>
       </p:sp>
       <p:sp>
         <p:nvSpPr>
@@ -15791,6 +16059,10 @@
           </a:solidFill>
           <a:ln/>
         </p:spPr>
+        <p:txBody>
+          <a:bodyPr/>
+          <a:p/>
+        </p:txBody>
       </p:sp>
       <p:pic>
         <p:nvPicPr>
@@ -15835,6 +16107,10 @@
           </a:solidFill>
           <a:ln/>
         </p:spPr>
+        <p:txBody>
+          <a:bodyPr/>
+          <a:p/>
+        </p:txBody>
       </p:sp>
       <p:sp>
         <p:nvSpPr>
@@ -15972,6 +16248,10 @@
           </a:solidFill>
           <a:ln/>
         </p:spPr>
+        <p:txBody>
+          <a:bodyPr/>
+          <a:p/>
+        </p:txBody>
       </p:sp>
       <p:pic>
         <p:nvPicPr>
@@ -16204,6 +16484,10 @@
           </a:solidFill>
           <a:ln/>
         </p:spPr>
+        <p:txBody>
+          <a:bodyPr/>
+          <a:p/>
+        </p:txBody>
       </p:sp>
       <p:pic>
         <p:nvPicPr>
@@ -16436,6 +16720,10 @@
           </a:solidFill>
           <a:ln/>
         </p:spPr>
+        <p:txBody>
+          <a:bodyPr/>
+          <a:p/>
+        </p:txBody>
       </p:sp>
       <p:pic>
         <p:nvPicPr>
@@ -16561,6 +16849,10 @@
             <a:prstDash val="solid"/>
           </a:ln>
         </p:spPr>
+        <p:txBody>
+          <a:bodyPr/>
+          <a:p/>
+        </p:txBody>
       </p:sp>
       <p:sp>
         <p:nvSpPr>
@@ -16581,6 +16873,10 @@
           </a:solidFill>
           <a:ln/>
         </p:spPr>
+        <p:txBody>
+          <a:bodyPr/>
+          <a:p/>
+        </p:txBody>
       </p:sp>
       <p:pic>
         <p:nvPicPr>
@@ -16706,6 +17002,10 @@
             <a:prstDash val="solid"/>
           </a:ln>
         </p:spPr>
+        <p:txBody>
+          <a:bodyPr/>
+          <a:p/>
+        </p:txBody>
       </p:sp>
       <p:sp>
         <p:nvSpPr>
@@ -16726,6 +17026,10 @@
           </a:solidFill>
           <a:ln/>
         </p:spPr>
+        <p:txBody>
+          <a:bodyPr/>
+          <a:p/>
+        </p:txBody>
       </p:sp>
       <p:pic>
         <p:nvPicPr>
@@ -16848,6 +17152,10 @@
           </a:solidFill>
           <a:ln/>
         </p:spPr>
+        <p:txBody>
+          <a:bodyPr/>
+          <a:p/>
+        </p:txBody>
       </p:sp>
       <p:pic>
         <p:nvPicPr>
@@ -17087,6 +17395,10 @@
             <a:prstDash val="solid"/>
           </a:ln>
         </p:spPr>
+        <p:txBody>
+          <a:bodyPr/>
+          <a:p/>
+        </p:txBody>
       </p:sp>
       <p:sp>
         <p:nvSpPr>
@@ -17192,6 +17504,10 @@
             <a:prstDash val="solid"/>
           </a:ln>
         </p:spPr>
+        <p:txBody>
+          <a:bodyPr/>
+          <a:p/>
+        </p:txBody>
       </p:sp>
       <p:sp>
         <p:nvSpPr>
@@ -17297,6 +17613,10 @@
             <a:prstDash val="solid"/>
           </a:ln>
         </p:spPr>
+        <p:txBody>
+          <a:bodyPr/>
+          <a:p/>
+        </p:txBody>
       </p:sp>
       <p:sp>
         <p:nvSpPr>
@@ -17434,6 +17754,10 @@
           </a:solidFill>
           <a:ln/>
         </p:spPr>
+        <p:txBody>
+          <a:bodyPr/>
+          <a:p/>
+        </p:txBody>
       </p:sp>
       <p:pic>
         <p:nvPicPr>
@@ -17666,6 +17990,10 @@
           </a:solidFill>
           <a:ln/>
         </p:spPr>
+        <p:txBody>
+          <a:bodyPr/>
+          <a:p/>
+        </p:txBody>
       </p:sp>
       <p:pic>
         <p:nvPicPr>
@@ -17898,6 +18226,10 @@
           </a:solidFill>
           <a:ln/>
         </p:spPr>
+        <p:txBody>
+          <a:bodyPr/>
+          <a:p/>
+        </p:txBody>
       </p:sp>
       <p:pic>
         <p:nvPicPr>
@@ -18023,6 +18355,10 @@
             <a:prstDash val="solid"/>
           </a:ln>
         </p:spPr>
+        <p:txBody>
+          <a:bodyPr/>
+          <a:p/>
+        </p:txBody>
       </p:sp>
       <p:sp>
         <p:nvSpPr>
@@ -18043,6 +18379,10 @@
           </a:solidFill>
           <a:ln/>
         </p:spPr>
+        <p:txBody>
+          <a:bodyPr/>
+          <a:p/>
+        </p:txBody>
       </p:sp>
       <p:pic>
         <p:nvPicPr>
@@ -18140,7 +18480,7 @@
                 <a:ea typeface="Calibri" pitchFamily="34" charset="-122"/>
                 <a:cs typeface="Calibri" pitchFamily="34" charset="-120"/>
               </a:rPr>
-              <a:t>پس از کسر ۱۵٪ سهم بنیاد، (~۸.۹۴ میلیون سورن در سال)، بدون احتساب کارمزد عضویت (اکنون مستقیم بین ولیدیتورها)/اسلش — پوشش بخش بزرگی از کمبود چندساله‌ی بنیاد.</a:t>
+              <a:t>پس از کسر ۱۵٪ ثابت بنیاد و سهم مستقیم حکمرانی‌شونده‌ی ولیدیتورها (پیش‌فرض ۵۰٪)، (~۷.۳۶ میلیون سورن در سال)، بدون احتساب کارمزد عضویت (اکنون مستقیم بین ولیدیتورها)/اسلش — پوشش بخش بزرگی از کمبود چندساله‌ی بنیاد.</a:t>
             </a:r>
             <a:endParaRPr lang="en-US" sz="1200" dirty="0"/>
           </a:p>
@@ -18165,6 +18505,10 @@
           </a:solidFill>
           <a:ln/>
         </p:spPr>
+        <p:txBody>
+          <a:bodyPr/>
+          <a:p/>
+        </p:txBody>
       </p:sp>
       <p:pic>
         <p:nvPicPr>
@@ -18397,6 +18741,10 @@
           </a:solidFill>
           <a:ln/>
         </p:spPr>
+        <p:txBody>
+          <a:bodyPr/>
+          <a:p/>
+        </p:txBody>
       </p:sp>
       <p:pic>
         <p:nvPicPr>
@@ -18629,6 +18977,10 @@
           </a:solidFill>
           <a:ln/>
         </p:spPr>
+        <p:txBody>
+          <a:bodyPr/>
+          <a:p/>
+        </p:txBody>
       </p:sp>
       <p:pic>
         <p:nvPicPr>
@@ -18754,6 +19106,10 @@
             <a:prstDash val="solid"/>
           </a:ln>
         </p:spPr>
+        <p:txBody>
+          <a:bodyPr/>
+          <a:p/>
+        </p:txBody>
       </p:sp>
       <p:sp>
         <p:nvSpPr>
@@ -18774,6 +19130,10 @@
           </a:solidFill>
           <a:ln/>
         </p:spPr>
+        <p:txBody>
+          <a:bodyPr/>
+          <a:p/>
+        </p:txBody>
       </p:sp>
       <p:pic>
         <p:nvPicPr>
@@ -18899,6 +19259,10 @@
             <a:prstDash val="solid"/>
           </a:ln>
         </p:spPr>
+        <p:txBody>
+          <a:bodyPr/>
+          <a:p/>
+        </p:txBody>
       </p:sp>
       <p:sp>
         <p:nvSpPr>
@@ -18919,6 +19283,10 @@
           </a:solidFill>
           <a:ln/>
         </p:spPr>
+        <p:txBody>
+          <a:bodyPr/>
+          <a:p/>
+        </p:txBody>
       </p:sp>
       <p:pic>
         <p:nvPicPr>
@@ -19041,6 +19409,10 @@
           </a:solidFill>
           <a:ln/>
         </p:spPr>
+        <p:txBody>
+          <a:bodyPr/>
+          <a:p/>
+        </p:txBody>
       </p:sp>
       <p:pic>
         <p:nvPicPr>
@@ -19273,6 +19645,10 @@
           </a:solidFill>
           <a:ln/>
         </p:spPr>
+        <p:txBody>
+          <a:bodyPr/>
+          <a:p/>
+        </p:txBody>
       </p:sp>
       <p:pic>
         <p:nvPicPr>
@@ -20501,6 +20877,10 @@
           </a:solidFill>
           <a:ln/>
         </p:spPr>
+        <p:txBody>
+          <a:bodyPr/>
+          <a:p/>
+        </p:txBody>
       </p:sp>
       <p:pic>
         <p:nvPicPr>
@@ -20655,6 +21035,10 @@
           </a:solidFill>
           <a:ln/>
         </p:spPr>
+        <p:txBody>
+          <a:bodyPr/>
+          <a:p/>
+        </p:txBody>
       </p:sp>
       <p:sp>
         <p:nvSpPr>
@@ -20675,6 +21059,10 @@
           </a:solidFill>
           <a:ln/>
         </p:spPr>
+        <p:txBody>
+          <a:bodyPr/>
+          <a:p/>
+        </p:txBody>
       </p:sp>
       <p:pic>
         <p:nvPicPr>
@@ -20909,6 +21297,10 @@
           </a:solidFill>
           <a:ln/>
         </p:spPr>
+        <p:txBody>
+          <a:bodyPr/>
+          <a:p/>
+        </p:txBody>
       </p:sp>
       <p:sp>
         <p:nvSpPr>
@@ -20931,6 +21323,10 @@
           </a:solidFill>
           <a:ln/>
         </p:spPr>
+        <p:txBody>
+          <a:bodyPr/>
+          <a:p/>
+        </p:txBody>
       </p:sp>
       <p:sp>
         <p:nvSpPr>
@@ -21107,6 +21503,10 @@
           </a:solidFill>
           <a:ln/>
         </p:spPr>
+        <p:txBody>
+          <a:bodyPr/>
+          <a:p/>
+        </p:txBody>
       </p:sp>
       <p:pic>
         <p:nvPicPr>
@@ -21341,6 +21741,10 @@
           </a:solidFill>
           <a:ln/>
         </p:spPr>
+        <p:txBody>
+          <a:bodyPr/>
+          <a:p/>
+        </p:txBody>
       </p:sp>
       <p:sp>
         <p:nvSpPr>
@@ -21363,6 +21767,10 @@
           </a:solidFill>
           <a:ln/>
         </p:spPr>
+        <p:txBody>
+          <a:bodyPr/>
+          <a:p/>
+        </p:txBody>
       </p:sp>
       <p:sp>
         <p:nvSpPr>
@@ -21539,6 +21947,10 @@
           </a:solidFill>
           <a:ln/>
         </p:spPr>
+        <p:txBody>
+          <a:bodyPr/>
+          <a:p/>
+        </p:txBody>
       </p:sp>
       <p:pic>
         <p:nvPicPr>
@@ -21773,6 +22185,10 @@
           </a:solidFill>
           <a:ln/>
         </p:spPr>
+        <p:txBody>
+          <a:bodyPr/>
+          <a:p/>
+        </p:txBody>
       </p:sp>
       <p:sp>
         <p:nvSpPr>
@@ -21795,6 +22211,10 @@
           </a:solidFill>
           <a:ln/>
         </p:spPr>
+        <p:txBody>
+          <a:bodyPr/>
+          <a:p/>
+        </p:txBody>
       </p:sp>
       <p:sp>
         <p:nvSpPr>
@@ -21907,7 +22327,7 @@
                 <a:ea typeface="Calibri" pitchFamily="34" charset="-122"/>
                 <a:cs typeface="Calibri" pitchFamily="34" charset="-120"/>
               </a:rPr>
-              <a:t>بودجه‌ی کمپین همچنان بدون اتصال کدی است؛ فقط هزینه‌ی جاری بنیاد (۱۵٪ سهم ریوارد خزانه) اکنون خودکار و مستقیم منتقل می‌شود.</a:t>
+              <a:t>بودجه‌ی کمپین همچنان بدون اتصال کدی است؛ فقط هزینه‌ی جاری بنیاد (۱۵٪ کل بلاک‌ریوارد، مستقل از سهم خزانه) اکنون خودکار و مستقیم منتقل می‌شود.</a:t>
             </a:r>
             <a:endParaRPr lang="en-US" sz="1300" dirty="0"/>
           </a:p>
@@ -21971,6 +22391,10 @@
           </a:solidFill>
           <a:ln/>
         </p:spPr>
+        <p:txBody>
+          <a:bodyPr/>
+          <a:p/>
+        </p:txBody>
       </p:sp>
       <p:pic>
         <p:nvPicPr>
@@ -22205,6 +22629,10 @@
           </a:solidFill>
           <a:ln/>
         </p:spPr>
+        <p:txBody>
+          <a:bodyPr/>
+          <a:p/>
+        </p:txBody>
       </p:sp>
       <p:sp>
         <p:nvSpPr>
@@ -22227,6 +22655,10 @@
           </a:solidFill>
           <a:ln/>
         </p:spPr>
+        <p:txBody>
+          <a:bodyPr/>
+          <a:p/>
+        </p:txBody>
       </p:sp>
       <p:sp>
         <p:nvSpPr>
@@ -22403,6 +22835,10 @@
           </a:solidFill>
           <a:ln/>
         </p:spPr>
+        <p:txBody>
+          <a:bodyPr/>
+          <a:p/>
+        </p:txBody>
       </p:sp>
       <p:pic>
         <p:nvPicPr>
@@ -22637,6 +23073,10 @@
           </a:solidFill>
           <a:ln/>
         </p:spPr>
+        <p:txBody>
+          <a:bodyPr/>
+          <a:p/>
+        </p:txBody>
       </p:sp>
       <p:sp>
         <p:nvSpPr>
@@ -22659,6 +23099,10 @@
           </a:solidFill>
           <a:ln/>
         </p:spPr>
+        <p:txBody>
+          <a:bodyPr/>
+          <a:p/>
+        </p:txBody>
       </p:sp>
       <p:sp>
         <p:nvSpPr>
@@ -22835,6 +23279,10 @@
           </a:solidFill>
           <a:ln/>
         </p:spPr>
+        <p:txBody>
+          <a:bodyPr/>
+          <a:p/>
+        </p:txBody>
       </p:sp>
       <p:pic>
         <p:nvPicPr>
@@ -23067,6 +23515,10 @@
           </a:solidFill>
           <a:ln/>
         </p:spPr>
+        <p:txBody>
+          <a:bodyPr/>
+          <a:p/>
+        </p:txBody>
       </p:sp>
       <p:pic>
         <p:nvPicPr>

--- a/presentations/Sur - Board Presentation.pptx
+++ b/presentations/Sur - Board Presentation.pptx
@@ -9876,7 +9876,7 @@
                 <a:ea typeface="Calibri" pitchFamily="34" charset="-122"/>
                 <a:cs typeface="Calibri" pitchFamily="34" charset="-120"/>
               </a:rPr>
-              <a:t>بعد از ۶ ماه، عرضه/تقاضا قیمت را تعیین می‌کند</a:t>
+              <a:t>بعد از ۶ ماه: ابتدا ۴۵ روز گذار کنترل‌شده، سپس عرضه/تقاضا قیمت را تعیین می‌کند</a:t>
             </a:r>
             <a:endParaRPr lang="en-US" sz="1100" dirty="0"/>
           </a:p>
@@ -10174,7 +10174,7 @@
                 <a:ea typeface="Calibri" pitchFamily="34" charset="-122"/>
                 <a:cs typeface="Calibri" pitchFamily="34" charset="-120"/>
               </a:rPr>
-              <a:t>◆  ۵۰٪ این مبلغ → خزانه‌ی مشترک ولیدیتورها (ValidatorsTreasury)</a:t>
+              <a:t>◆  ۱۵٪ ثابت → بنیاد؛ ۵۰٪ پیش‌فرض (حکمرانی‌شونده، ۴۰-۶۵٪) → مستقیم بین ولیدیتورها؛ ۳۵٪ باقی‌مانده → خزانه‌ی مشترک ولیدیتورها (ValidatorsTreasury)</a:t>
             </a:r>
             <a:endParaRPr lang="en-US" sz="1400" dirty="0"/>
           </a:p>
@@ -10194,7 +10194,7 @@
                 <a:ea typeface="Calibri" pitchFamily="34" charset="-122"/>
                 <a:cs typeface="Calibri" pitchFamily="34" charset="-120"/>
               </a:rPr>
-              <a:t>◆  ۵۰٪ باقی‌مانده + ۱۰۰٪ فی تمام تراکنش‌ها → مستقیم بین ولیدیتورها، به نسبت تعداد بلاک تولیدی هرکدام</a:t>
+              <a:t>◆  از فی معمولی تراکنش‌ها: ۳۰٪ سوزانده می‌شود، ۷۰٪ + ۱۰۰٪ کارمزد عضویت → مستقیم بین ولیدیتورها، به نسبت تعداد بلاک تولیدی هرکدام</a:t>
             </a:r>
             <a:endParaRPr lang="en-US" sz="1400" dirty="0"/>
           </a:p>
@@ -13845,7 +13845,7 @@
                 <a:ea typeface="Calibri" pitchFamily="34" charset="-122"/>
                 <a:cs typeface="Calibri" pitchFamily="34" charset="-120"/>
               </a:rPr>
-              <a:t>در یک دوره‌ی بازگشت مشخص، اگر دوباره لایوینس تأیید شود، بدون هیچ جریمه‌ای به فعال برمی‌گردد</a:t>
+              <a:t>حداقل ۴۸ ساعت بعد، اگر نسبت موفقیت لایوینس (۹۵٪+، با حداقل تعداد بررسی کافی) دوباره برقرار شود، به فعال برمی‌گردد</a:t>
             </a:r>
             <a:endParaRPr lang="en-US" sz="1100" dirty="0"/>
           </a:p>
@@ -14061,7 +14061,7 @@
                 <a:ea typeface="Calibri" pitchFamily="34" charset="-122"/>
                 <a:cs typeface="Calibri" pitchFamily="34" charset="-120"/>
               </a:rPr>
-              <a:t>بعد از دوره‌ی بازگشت، خروج رسمی با cooldown؛ بخشی از وثیقه طبق درصد اسلش کسر می‌شود</a:t>
+              <a:t>جریمه‌ی وثیقه (۱٪ طبق درصد اسلش) در لحظه‌ی دموت تعیین‌تکلیف می‌شود — مستقل از تصمیم بعدی برای بازگشت یا خروج رسمی (cooldown یک‌هفته‌ای)</a:t>
             </a:r>
             <a:endParaRPr lang="en-US" sz="1100" dirty="0"/>
           </a:p>
@@ -14620,7 +14620,7 @@
                 <a:ea typeface="Calibri" pitchFamily="34" charset="-122"/>
                 <a:cs typeface="Calibri" pitchFamily="34" charset="-120"/>
               </a:rPr>
-              <a:t>نصاب دوسوم: افزودن/حذف عضو، خرج سورن (proposeSendETH)</a:t>
+              <a:t>نصاب دوسوم: فقط افزودن/حذف عضو</a:t>
             </a:r>
             <a:endParaRPr lang="en-US" sz="1550" dirty="0"/>
           </a:p>
@@ -14773,7 +14773,7 @@
                 <a:ea typeface="Calibri" pitchFamily="34" charset="-122"/>
                 <a:cs typeface="Calibri" pitchFamily="34" charset="-120"/>
               </a:rPr>
-              <a:t>نصاب اکثریت ساده: انتقال ERC20، اجرای دلخواه (Execute)</a:t>
+              <a:t>نصاب اکثریت ساده: خرج سورن (proposeSendETH)، انتقال ERC20، اجرای دلخواه (Execute)</a:t>
             </a:r>
             <a:endParaRPr lang="en-US" sz="1550" dirty="0"/>
           </a:p>
@@ -15130,7 +15130,7 @@
                 <a:ea typeface="Calibri" pitchFamily="34" charset="-122"/>
                 <a:cs typeface="Calibri" pitchFamily="34" charset="-120"/>
               </a:rPr>
-              <a:t>◆  هیچ کنترلی روی شبکه، ولیدیتورها، یا هیچ اوراکل عملیاتی‌ای ندارد</a:t>
+              <a:t>◆  هیچ کنترلی روی شبکه، ولیدیتورها، یا اوراکل‌های مرتبط با اجماع ندارد (جز دو اوراکل عملیاتی خودش: هویت و پرداخت)</a:t>
             </a:r>
             <a:endParaRPr lang="en-US" sz="1400" dirty="0"/>
           </a:p>
@@ -16007,7 +16007,7 @@
                 <a:ea typeface="Calibri" pitchFamily="34" charset="-122"/>
                 <a:cs typeface="Calibri" pitchFamily="34" charset="-120"/>
               </a:rPr>
-              <a:t>برای SendETH، حداقل ۱۰ رأی از ۱۵ عضو لازم است</a:t>
+              <a:t>برای SendETH، حداقل ۸ رأی از ۱۵ عضو لازم است (اکثریت ساده — نه دوسوم)</a:t>
             </a:r>
             <a:endParaRPr lang="en-US" sz="1100" dirty="0"/>
           </a:p>
@@ -18441,7 +18441,7 @@
                 <a:ea typeface="Calibri" pitchFamily="34" charset="-122"/>
                 <a:cs typeface="Calibri" pitchFamily="34" charset="-120"/>
               </a:rPr>
-              <a:t>توان مالی واقعی: ~۴۴.۶۸ میلیون سورن تجمعی تا سال پنجم</a:t>
+              <a:t>توان مالی واقعی: ~۳۶.۷۹ میلیون سورن تجمعی تا سال پنجم</a:t>
             </a:r>
             <a:endParaRPr lang="en-US" sz="1550" dirty="0"/>
           </a:p>
@@ -19231,7 +19231,7 @@
                 <a:ea typeface="Calibri" pitchFamily="34" charset="-122"/>
                 <a:cs typeface="Calibri" pitchFamily="34" charset="-120"/>
               </a:rPr>
-              <a:t>بانک مرکزی این دو مقوله را رسماً از هم جدا کرده — سورن در دسته‌ی دوم جا می‌گیرد.</a:t>
+              <a:t>بانک مرکزی این دو مقوله را رسماً از هم جدا کرده؛ این‌که سورن دقیقاً در کدام دسته جا می‌گیرد، نیازمند تأیید مستقل حقوقی است.</a:t>
             </a:r>
             <a:endParaRPr lang="en-US" sz="1200" dirty="0"/>
           </a:p>
@@ -20250,7 +20250,7 @@
                           <a:ea typeface="Calibri" pitchFamily="34" charset="-122"/>
                           <a:cs typeface="Calibri" pitchFamily="34" charset="-120"/>
                         </a:rPr>
-                        <a:t>درصد اسلش، دوره‌ی cooldown خروج ولیدیتور</a:t>
+                        <a:t>آستانه‌ی توقف جریمه‌ی دسته‌جمعی (فعلاً ۲۰٪)؛ آزمون اجرایی inactivityThreshold پیش از شبکه‌ی اصلی</a:t>
                       </a:r>
                       <a:endParaRPr lang="en-US" sz="1200" dirty="0">
                         <a:latin typeface="Calibri" charset="0"/>
@@ -23215,7 +23215,7 @@
                 <a:ea typeface="Calibri" pitchFamily="34" charset="-122"/>
                 <a:cs typeface="Calibri" pitchFamily="34" charset="-120"/>
               </a:rPr>
-              <a:t>نصاب دوگانه: افزودن/حذف عضو و خرج سورن نیازمند دوسوم آرا؛ بقیه (ERC20، Execute) اکثریت ساده.</a:t>
+              <a:t>نصاب دوگانه: فقط افزودن/حذف عضو نیازمند دوسوم آرا؛ بقیه (خرج سورن، ERC20، Execute) اکثریت ساده.</a:t>
             </a:r>
             <a:endParaRPr lang="en-US" sz="1300" dirty="0"/>
           </a:p>

--- a/presentations/Sur - Board Presentation.pptx
+++ b/presentations/Sur - Board Presentation.pptx
@@ -10878,7 +10878,7 @@
                 <a:ea typeface="Calibri" pitchFamily="34" charset="-122"/>
                 <a:cs typeface="Calibri" pitchFamily="34" charset="-120"/>
               </a:rPr>
-              <a:t>◆  درصد اسلش، آستانه‌ی غیرفعالی، دوره‌ی بازگشت، cooldown خروج</a:t>
+              <a:t>◆  درصد اسلش، دوره‌ی بازگشت، cooldown خروج، سقف‌های خزانه</a:t>
             </a:r>
             <a:endParaRPr lang="en-US" sz="1250" dirty="0"/>
           </a:p>
@@ -10960,7 +10960,7 @@
                 <a:ea typeface="Calibri" pitchFamily="34" charset="-122"/>
                 <a:cs typeface="Calibri" pitchFamily="34" charset="-120"/>
               </a:rPr>
-              <a:t>◆  انتخاب با رأی‌گیری تأییدی مستمر، بدون دوره‌ی ثابت</a:t>
+              <a:t>◆  رأی آزاد و پیوسته؛ ترکیب عادی هر ۳۰ روز؛ بدون عزل اضطراری</a:t>
             </a:r>
             <a:endParaRPr lang="en-US" sz="1250" dirty="0"/>
           </a:p>
@@ -12386,7 +12386,7 @@
                           <a:ea typeface="Calibri" pitchFamily="34" charset="-122"/>
                           <a:cs typeface="Calibri" pitchFamily="34" charset="-120"/>
                         </a:rPr>
-                        <a:t>زیر سقف smallBudgetCap، از خزانه‌ی ولیدیتورها</a:t>
+                        <a:t>حداقل ۳ رأی؛ هر پرداخت &lt; ۵۰٬۰۰۰ و مجموع ۳۰روزه ≤ ۲۰۰٬۰۰۰ سورن (سقف‌ها را مجمع تعیین می‌کند)</a:t>
                       </a:r>
                       <a:endParaRPr lang="en-US" sz="1300" dirty="0">
                         <a:latin typeface="Calibri" charset="0"/>
@@ -12938,7 +12938,7 @@
                           <a:ea typeface="Calibri" pitchFamily="34" charset="-122"/>
                           <a:cs typeface="Calibri" pitchFamily="34" charset="-120"/>
                         </a:rPr>
-                        <a:t>کلید عملیاتی گزارش لایوینس</a:t>
+                        <a:t>کلید عملیاتی تصمیم‌های وضعیت ولیدیتور</a:t>
                       </a:r>
                       <a:endParaRPr lang="en-US" sz="1300" dirty="0">
                         <a:latin typeface="Calibri" charset="0"/>
@@ -13413,7 +13413,7 @@
                 <a:ea typeface="Calibri" pitchFamily="34" charset="-122"/>
                 <a:cs typeface="Calibri" pitchFamily="34" charset="-120"/>
               </a:rPr>
-              <a:t>بعد از عبور از آستانه‌ی غیرفعالی، هر شخصی (نه فقط بنیاد/هیأت) می‌تواند دموت را permissionless فعال کند</a:t>
+              <a:t>verifier پس از ۴ ساعت غیرفعالیِ تأییدشده (در اولین بررسی ساعتیِ بعدی) وضعیت را ثبت می‌کند و ولیدیتور فوراً از مجموعه‌ی فعال خارج می‌شود</a:t>
             </a:r>
             <a:endParaRPr lang="en-US" sz="1100" dirty="0"/>
           </a:p>
@@ -14022,7 +14022,7 @@
                 <a:ea typeface="Calibri" pitchFamily="34" charset="-122"/>
                 <a:cs typeface="Calibri" pitchFamily="34" charset="-120"/>
               </a:rPr>
-              <a:t>عدم بازگشت = خروج + اسلش</a:t>
+              <a:t>جریمه فقط با روند شواهد و اعتراض</a:t>
             </a:r>
             <a:endParaRPr lang="en-US" sz="1300" dirty="0"/>
           </a:p>
@@ -14061,7 +14061,7 @@
                 <a:ea typeface="Calibri" pitchFamily="34" charset="-122"/>
                 <a:cs typeface="Calibri" pitchFamily="34" charset="-120"/>
               </a:rPr>
-              <a:t>جریمه‌ی وثیقه (۱٪ طبق درصد اسلش) در لحظه‌ی دموت تعیین‌تکلیف می‌شود — مستقل از تصمیم بعدی برای بازگشت یا خروج رسمی (cooldown یک‌هفته‌ای)</a:t>
+              <a:t>جریمه‌ی وثیقه (۱٪) بلافاصله اجرا نمی‌شود: بررسی رخداد جمعی، تحویل شواهد، مهلت ۷۲ساعته‌ی اعتراض و در صورت اعتراض رأی مجمع؛ نبود نصاب = رد جریمه</a:t>
             </a:r>
             <a:endParaRPr lang="en-US" sz="1100" dirty="0"/>
           </a:p>
@@ -20250,7 +20250,7 @@
                           <a:ea typeface="Calibri" pitchFamily="34" charset="-122"/>
                           <a:cs typeface="Calibri" pitchFamily="34" charset="-120"/>
                         </a:rPr>
-                        <a:t>آستانه‌ی توقف جریمه‌ی دسته‌جمعی (فعلاً ۲۰٪)؛ آزمون اجرایی inactivityThreshold پیش از شبکه‌ی اصلی</a:t>
+                        <a:t>آستانه‌ی توقف جریمه‌ی دسته‌جمعی (فعلاً ۲۰٪)؛ مهلت احیا پیش از بازیابی اضطراری؛ آزمون اجرایی تعلیق ۴ساعته و بازیابی اضطراری روی Besu</a:t>
                       </a:r>
                       <a:endParaRPr lang="en-US" sz="1200" dirty="0">
                         <a:latin typeface="Calibri" charset="0"/>
@@ -21439,7 +21439,7 @@
                 <a:ea typeface="Calibri" pitchFamily="34" charset="-122"/>
                 <a:cs typeface="Calibri" pitchFamily="34" charset="-120"/>
               </a:rPr>
-              <a:t>فقط verifier (پس از بررسی واقعی) می‌تواند reportLiveness بزند — برای Probation از admin_peers، برای Active از تولید واقعی بلاک.</a:t>
+              <a:t>فقط verifier وضعیت را ثبت می‌کند (recordActivation / recordSuspension / recordRecovery) — نه با هر بررسی، فقط وقتی وضعیت واقعاً عوض شود. بررسی آف‌چین هر ساعت است؛ تعلیق پس از ۴ ساعت غیرفعالیِ تأییدشده.</a:t>
             </a:r>
             <a:endParaRPr lang="en-US" sz="1300" dirty="0"/>
           </a:p>

--- a/presentations/Sur - Board Presentation.pptx
+++ b/presentations/Sur - Board Presentation.pptx
@@ -12386,7 +12386,7 @@
                           <a:ea typeface="Calibri" pitchFamily="34" charset="-122"/>
                           <a:cs typeface="Calibri" pitchFamily="34" charset="-120"/>
                         </a:rPr>
-                        <a:t>حداقل ۳ رأی؛ هر پرداخت &lt; ۵۰٬۰۰۰ و مجموع ۳۰روزه ≤ ۲۰۰٬۰۰۰ سورن (سقف‌ها را مجمع تعیین می‌کند)</a:t>
+                        <a:t>حداقل ۳ رأی؛ هر پرداخت ≤ ۵۰٬۰۰۰ و مجموع ۳۰روزه ≤ ۲۰۰٬۰۰۰ سورن (سقف‌ها را مجمع تعیین می‌کند)</a:t>
                       </a:r>
                       <a:endParaRPr lang="en-US" sz="1300" dirty="0">
                         <a:latin typeface="Calibri" charset="0"/>

--- a/presentations/Sur - Board Presentation.pptx
+++ b/presentations/Sur - Board Presentation.pptx
@@ -4611,7 +4611,7 @@
                           <a:ea typeface="Calibri" pitchFamily="34" charset="-122"/>
                           <a:cs typeface="Calibri" pitchFamily="34" charset="-120"/>
                         </a:rPr>
-                        <a:t>حکمرانی داخلی بنیاد (۱۵ عضو) — صفر کنترل روی شبکه</a:t>
+                        <a:t>حکمرانی داخلی بنیاد (۱۵ عضو) — بدون کنترل اجماع؛ فقط کلید اوراکل هویت/پرداخت</a:t>
                       </a:r>
                       <a:endParaRPr lang="en-US" sz="1150" dirty="0">
                         <a:latin typeface="Calibri" charset="0"/>
@@ -5023,7 +5023,7 @@
                           <a:ea typeface="Calibri" pitchFamily="34" charset="-122"/>
                           <a:cs typeface="Calibri" pitchFamily="34" charset="-120"/>
                         </a:rPr>
-                        <a:t>مرجع اجماع (getValidators) و پرداخت (isValidator)؛ وثیقه، لایوینس</a:t>
+                        <a:t>مرجع اجماع (getValidators)؛ صلاحیت پرداخت everActivated + N−1؛ وثیقه، لایوینس</a:t>
                       </a:r>
                       <a:endParaRPr lang="en-US" sz="1150" dirty="0">
                         <a:latin typeface="Calibri" charset="0"/>
@@ -5435,7 +5435,7 @@
                           <a:ea typeface="Calibri" pitchFamily="34" charset="-122"/>
                           <a:cs typeface="Calibri" pitchFamily="34" charset="-120"/>
                         </a:rPr>
-                        <a:t>خزانه‌ی مشترک ولیدیتورها؛ دو مسیر خرج</a:t>
+                        <a:t>خزانه‌ی مشترک ولیدیتورها؛ تنها مسیر خرج: هیأت، زیر سقف‌ها</a:t>
                       </a:r>
                       <a:endParaRPr lang="en-US" sz="1150" dirty="0">
                         <a:latin typeface="Calibri" charset="0"/>
@@ -6014,7 +6014,7 @@
                 <a:ea typeface="Calibri" pitchFamily="34" charset="-122"/>
                 <a:cs typeface="Calibri" pitchFamily="34" charset="-120"/>
               </a:rPr>
-              <a:t>هیچ نهاد واحدی هم‌زمان مرجع اجماع و مرجع مالی نیست</a:t>
+              <a:t>مرجع اجماع و نهادهای مالی از نظر سازمانی جدا هستند</a:t>
             </a:r>
             <a:endParaRPr lang="en-US" sz="1550" dirty="0"/>
           </a:p>
@@ -6053,7 +6053,7 @@
                 <a:ea typeface="Calibri" pitchFamily="34" charset="-122"/>
                 <a:cs typeface="Calibri" pitchFamily="34" charset="-120"/>
               </a:rPr>
-              <a:t>بنیاد فقط حکمرانی داخلی؛ ولیدیتورها فقط اجماع و اقتصاد شبکه — این تفکیک در سراسر معماری تکرار می‌شود.</a:t>
+              <a:t>بنیاد: حکمرانی داخلی + دو اوراکل هویت/پرداخت؛ ولیدیتورها: اجماع و اقتصاد شبکه. این تفکیک سازمانی است، نه نبود هرگونه هم‌پوشانی قدرت.</a:t>
             </a:r>
             <a:endParaRPr lang="en-US" sz="1200" dirty="0"/>
           </a:p>
@@ -8201,7 +8201,7 @@
                 <a:ea typeface="Calibri" pitchFamily="34" charset="-122"/>
                 <a:cs typeface="Calibri" pitchFamily="34" charset="-120"/>
               </a:rPr>
-              <a:t>چون فهرست دقیق «کدام عضو، چقدر» از قبل مشخص است، نیازی به هیچ رأی‌گیری‌ای نیست — شفافیت کامل، بدون تضاد منافع.</a:t>
+              <a:t>فهرست «کدام عضو، چقدر» از قبل مشخص و افشا شده و مهلت اعتراض داشته — تصمیم تقسیمِ بعدی حذف می‌شود؛ ارزیابی اصل مبلغ بدهی همچنان شاهد مستقل می‌خواهد.</a:t>
             </a:r>
             <a:endParaRPr lang="en-US" sz="1200" dirty="0"/>
           </a:p>
@@ -8616,7 +8616,7 @@
                 <a:ea typeface="Cambria" pitchFamily="34" charset="-122"/>
                 <a:cs typeface="Cambria" pitchFamily="34" charset="-120"/>
               </a:rPr>
-              <a:t>۳۷.۲٪</a:t>
+              <a:t>۵۹.۲٪</a:t>
             </a:r>
             <a:endParaRPr lang="en-US" sz="3200" dirty="0"/>
           </a:p>
@@ -8655,7 +8655,7 @@
                 <a:ea typeface="Calibri" pitchFamily="34" charset="-122"/>
                 <a:cs typeface="Calibri" pitchFamily="34" charset="-120"/>
               </a:rPr>
-              <a:t>نرخ رشد سال اول (به‌جای رقم بسیار بالاتر با پایه‌ی قدیم)</a:t>
+              <a:t>نرخ رشد سال اول (انتشار ÷ عرضه‌ی ابتدای سال)</a:t>
             </a:r>
             <a:endParaRPr lang="en-US" sz="1200" dirty="0"/>
           </a:p>
@@ -8725,7 +8725,7 @@
                 <a:ea typeface="Cambria" pitchFamily="34" charset="-122"/>
                 <a:cs typeface="Cambria" pitchFamily="34" charset="-120"/>
               </a:rPr>
-              <a:t>۸.۶٪</a:t>
+              <a:t>۹.۳۵٪</a:t>
             </a:r>
             <a:endParaRPr lang="en-US" sz="3200" dirty="0"/>
           </a:p>
@@ -8764,7 +8764,7 @@
                 <a:ea typeface="Calibri" pitchFamily="34" charset="-122"/>
                 <a:cs typeface="Calibri" pitchFamily="34" charset="-120"/>
               </a:rPr>
-              <a:t>نرخ رشد سال دهم</a:t>
+              <a:t>نرخ رشد سال دهم (همان تعریف)</a:t>
             </a:r>
             <a:endParaRPr lang="en-US" sz="1200" dirty="0"/>
           </a:p>
@@ -9228,7 +9228,7 @@
                 <a:ea typeface="Calibri" pitchFamily="34" charset="-122"/>
                 <a:cs typeface="Calibri" pitchFamily="34" charset="-120"/>
               </a:rPr>
-              <a:t>قیمت پایه، محاسبه‌شده مستقل از block.timestamp</a:t>
+              <a:t>قیمت از block.timestamp محاسبه می‌شود، نه از گزارش اوراکل</a:t>
             </a:r>
             <a:endParaRPr lang="en-US" sz="1100" dirty="0"/>
           </a:p>
@@ -9660,7 +9660,7 @@
                 <a:ea typeface="Calibri" pitchFamily="34" charset="-122"/>
                 <a:cs typeface="Calibri" pitchFamily="34" charset="-120"/>
               </a:rPr>
-              <a:t>بنیاد فقط می‌فروشد؛ قرارداد خودش سورن را می‌فرستد</a:t>
+              <a:t>بنیاد فقط می‌فروشد (بدون بازخرید)؛ پس از گزارش paymentOracle قرارداد سورن را می‌فرستد</a:t>
             </a:r>
             <a:endParaRPr lang="en-US" sz="1100" dirty="0"/>
           </a:p>
@@ -10194,7 +10194,7 @@
                 <a:ea typeface="Calibri" pitchFamily="34" charset="-122"/>
                 <a:cs typeface="Calibri" pitchFamily="34" charset="-120"/>
               </a:rPr>
-              <a:t>◆  از فی معمولی تراکنش‌ها: ۳۰٪ سوزانده می‌شود، ۷۰٪ + ۱۰۰٪ کارمزد عضویت → مستقیم بین ولیدیتورها، به نسبت تعداد بلاک تولیدی هرکدام</a:t>
+              <a:t>◆  از فی معمولی تراکنش‌ها: ۳۰٪ سوزانده می‌شود، ۷۰٪ + ۱۰۰٪ کارمزد عضویت → بین تولیدکنندگان بلاک‌های بازه، به نسبت بلاک؛ خروج/تعلیق بعدی پاداش کار قبلی را حذف نمی‌کند</a:t>
             </a:r>
             <a:endParaRPr lang="en-US" sz="1400" dirty="0"/>
           </a:p>
@@ -10960,7 +10960,7 @@
                 <a:ea typeface="Calibri" pitchFamily="34" charset="-122"/>
                 <a:cs typeface="Calibri" pitchFamily="34" charset="-120"/>
               </a:rPr>
-              <a:t>◆  رأی آزاد و پیوسته؛ ترکیب عادی هر ۳۰ روز؛ بدون عزل اضطراری</a:t>
+              <a:t>◆  رأی آزاد و پیوسته؛ ترکیب هر ۳۰ روز با حداکثر یک تعویض؛ خروج = قطع فوری اختیار</a:t>
             </a:r>
             <a:endParaRPr lang="en-US" sz="1250" dirty="0"/>
           </a:p>
@@ -11676,7 +11676,7 @@
                 <a:ea typeface="Calibri" pitchFamily="34" charset="-122"/>
                 <a:cs typeface="Calibri" pitchFamily="34" charset="-120"/>
               </a:rPr>
-              <a:t>◆  پرداخت کارمزد عضویت (۴٪ وثیقه) — غیرقابل‌استرداد، مستقیم بین ولیدیتورهای فعال تقسیم می‌شود</a:t>
+              <a:t>◆  پرداخت کارمزد عضویت (۴٪ وثیقه) — غیرقابل‌استرداد، در توزیع بعدی بین تولیدکنندگان بلاک به نسبت بلاک تقسیم می‌شود</a:t>
             </a:r>
             <a:endParaRPr lang="en-US" sz="1400" dirty="0"/>
           </a:p>
@@ -12318,7 +12318,7 @@
                           <a:ea typeface="Calibri" pitchFamily="34" charset="-122"/>
                           <a:cs typeface="Calibri" pitchFamily="34" charset="-120"/>
                         </a:rPr>
-                        <a:t>تصویب بودجه‌ی کوچک</a:t>
+                        <a:t>خرج از خزانه (تنها مسیر)</a:t>
                       </a:r>
                       <a:endParaRPr lang="en-US" sz="1300" dirty="0">
                         <a:latin typeface="Calibri" charset="0"/>
@@ -13629,7 +13629,7 @@
                 <a:ea typeface="Calibri" pitchFamily="34" charset="-122"/>
                 <a:cs typeface="Calibri" pitchFamily="34" charset="-120"/>
               </a:rPr>
-              <a:t>از همان لحظه، سهم ریوارد/فی به این ولیدیتور دیگر تعلق نمی‌گیرد</a:t>
+              <a:t>از همان لحظه برای کار آینده پاداشی ندارد؛ پاداش بلاک‌های تولیدشده‌ی قبلی حذف نمی‌شود</a:t>
             </a:r>
             <a:endParaRPr lang="en-US" sz="1100" dirty="0"/>
           </a:p>
@@ -17729,7 +17729,7 @@
                 <a:ea typeface="Calibri" pitchFamily="34" charset="-122"/>
                 <a:cs typeface="Calibri" pitchFamily="34" charset="-120"/>
               </a:rPr>
-              <a:t>راه‌حل پیشنهادی: ۲۰ میلیون به‌عنوان حداقل (نه سقف) در نظر گرفته شود؛ کمبود از طریق کانال درخواست تکمیلی (هیأت‌مدیره‌ی ولیدیتورها) تأمین شود.</a:t>
+              <a:t>۲۰ میلیون حداقل است، نه سقف؛ کانال هیأت فقط تا سقف خزانه کمک می‌کند (برآورد حدود ۲.۴ میلیون در سال) — کمبود ۱۹ تا ۴۵ میلیون بدون افزایش سقف و منبع دیگر پوشش نمی‌یابد.</a:t>
             </a:r>
             <a:endParaRPr lang="en-US" sz="1350" dirty="0"/>
           </a:p>
@@ -18441,7 +18441,7 @@
                 <a:ea typeface="Calibri" pitchFamily="34" charset="-122"/>
                 <a:cs typeface="Calibri" pitchFamily="34" charset="-120"/>
               </a:rPr>
-              <a:t>توان مالی واقعی: ~۳۶.۷۹ میلیون سورن تجمعی تا سال پنجم</a:t>
+              <a:t>انباشت ~۳۶.۷۹M تا سال پنجم؛ توان خرج ≈۱۲.۲M (برآورد)</a:t>
             </a:r>
             <a:endParaRPr lang="en-US" sz="1550" dirty="0"/>
           </a:p>
@@ -18480,7 +18480,7 @@
                 <a:ea typeface="Calibri" pitchFamily="34" charset="-122"/>
                 <a:cs typeface="Calibri" pitchFamily="34" charset="-120"/>
               </a:rPr>
-              <a:t>پس از کسر ۱۵٪ ثابت بنیاد و سهم مستقیم حکمرانی‌شونده‌ی ولیدیتورها (پیش‌فرض ۵۰٪)، (~۷.۳۶ میلیون سورن در سال)، بدون احتساب کارمزد عضویت (اکنون مستقیم بین ولیدیتورها)/اسلش — پوشش بخش بزرگی از کمبود چندساله‌ی بنیاد.</a:t>
+              <a:t>پس از کسر ۱۵٪ ثابت بنیاد و سهم مستقیم حکمرانی‌شونده‌ی ولیدیتورها (پیش‌فرض ۵۰٪)، (~۷.۳۶ میلیون سورن در سال)، بدون احتساب کارمزد عضویت (اکنون مستقیم بین ولیدیتورها)/اسلش — ولی خرج فقط از مسیر هیأت و زیر سقف ۲۰۰هزار در ۳۰ روز است (≈۱۲.۲M در پنج سال، مشترک بین همه‌ی گیرندگان).</a:t>
             </a:r>
             <a:endParaRPr lang="en-US" sz="1200" dirty="0"/>
           </a:p>
@@ -20250,7 +20250,7 @@
                           <a:ea typeface="Calibri" pitchFamily="34" charset="-122"/>
                           <a:cs typeface="Calibri" pitchFamily="34" charset="-120"/>
                         </a:rPr>
-                        <a:t>آستانه‌ی توقف جریمه‌ی دسته‌جمعی (فعلاً ۲۰٪)؛ مهلت احیا پیش از بازیابی اضطراری؛ آزمون اجرایی تعلیق ۴ساعته و بازیابی اضطراری روی Besu</a:t>
+                        <a:t>آستانه‌ی توقف جریمه‌ی دسته‌جمعی (فعلاً ۲۰٪)؛ مهلت احیا پیش از بازیابی اضطراری؛ آزمون اجرایی تعلیق ۴ساعته و بازیابی اضطراری روی Besu؛ اجرای Besu روی کد فعلی (پس از L01–L03)</a:t>
                       </a:r>
                       <a:endParaRPr lang="en-US" sz="1200" dirty="0">
                         <a:latin typeface="Calibri" charset="0"/>
@@ -20388,7 +20388,7 @@
                           <a:ea typeface="Calibri" pitchFamily="34" charset="-122"/>
                           <a:cs typeface="Calibri" pitchFamily="34" charset="-120"/>
                         </a:rPr>
-                        <a:t>روش/زمان دقیق درخواست بودجه‌ی تکمیلی بازاریابی</a:t>
+                        <a:t>تأمین کمبود ۱۹ تا ۴۵ میلیون سورن (افزایش سقف خزانه یا منبع دیگر)</a:t>
                       </a:r>
                       <a:endParaRPr lang="en-US" sz="1200" dirty="0">
                         <a:latin typeface="Calibri" charset="0"/>
@@ -20664,7 +20664,7 @@
                           <a:ea typeface="Calibri" pitchFamily="34" charset="-122"/>
                           <a:cs typeface="Calibri" pitchFamily="34" charset="-120"/>
                         </a:rPr>
-                        <a:t>نوع دقیق ثبت حقوقی بنیاد، مشاوره‌ی حقوقی مستقل</a:t>
+                        <a:t>تأیید وضعیت ثبت با سند رسمی؛ مشاوره‌ی حقوقی مستقل</a:t>
                       </a:r>
                       <a:endParaRPr lang="en-US" sz="1200" dirty="0">
                         <a:latin typeface="Calibri" charset="0"/>

--- a/presentations/Sur - Board Presentation.pptx
+++ b/presentations/Sur - Board Presentation.pptx
@@ -39,6 +39,7 @@
     <p:sldId id="287" r:id="rId33"/>
     <p:sldId id="288" r:id="rId34"/>
     <p:sldId id="289" r:id="rId35"/>
+    <p:sldId id="291" r:id="rId42"/>
     <p:sldId id="290" r:id="rId36"/>
   </p:sldIdLst>
   <p:notesMasterIdLst>
@@ -4257,7 +4258,7 @@
                     <a:bodyPr/>
                     <a:lstStyle/>
                     <a:p>
-                      <a:pPr algn="ctr" indent="0" marL="0">
+                      <a:pPr rtl="1" algn="ctr" indent="0" marL="0">
                         <a:buNone/>
                       </a:pPr>
                       <a:r>
@@ -4325,7 +4326,7 @@
                     <a:bodyPr/>
                     <a:lstStyle/>
                     <a:p>
-                      <a:pPr algn="ctr" indent="0" marL="0">
+                      <a:pPr rtl="1" algn="ctr" indent="0" marL="0">
                         <a:buNone/>
                       </a:pPr>
                       <a:r>
@@ -4393,7 +4394,7 @@
                     <a:bodyPr/>
                     <a:lstStyle/>
                     <a:p>
-                      <a:pPr algn="ctr" indent="0" marL="0">
+                      <a:pPr rtl="1" algn="ctr" indent="0" marL="0">
                         <a:buNone/>
                       </a:pPr>
                       <a:r>
@@ -4599,7 +4600,7 @@
                     <a:bodyPr/>
                     <a:lstStyle/>
                     <a:p>
-                      <a:pPr algn="ctr" indent="0" marL="0">
+                      <a:pPr rtl="1" algn="ctr" indent="0" marL="0">
                         <a:buNone/>
                       </a:pPr>
                       <a:r>
@@ -4805,7 +4806,7 @@
                     <a:bodyPr/>
                     <a:lstStyle/>
                     <a:p>
-                      <a:pPr algn="ctr" indent="0" marL="0">
+                      <a:pPr rtl="1" algn="ctr" indent="0" marL="0">
                         <a:buNone/>
                       </a:pPr>
                       <a:r>
@@ -5011,7 +5012,7 @@
                     <a:bodyPr/>
                     <a:lstStyle/>
                     <a:p>
-                      <a:pPr algn="ctr" indent="0" marL="0">
+                      <a:pPr rtl="1" algn="ctr" indent="0" marL="0">
                         <a:buNone/>
                       </a:pPr>
                       <a:r>
@@ -5217,7 +5218,7 @@
                     <a:bodyPr/>
                     <a:lstStyle/>
                     <a:p>
-                      <a:pPr algn="ctr" indent="0" marL="0">
+                      <a:pPr rtl="1" algn="ctr" indent="0" marL="0">
                         <a:buNone/>
                       </a:pPr>
                       <a:r>
@@ -5423,7 +5424,7 @@
                     <a:bodyPr/>
                     <a:lstStyle/>
                     <a:p>
-                      <a:pPr algn="ctr" indent="0" marL="0">
+                      <a:pPr rtl="1" algn="ctr" indent="0" marL="0">
                         <a:buNone/>
                       </a:pPr>
                       <a:r>
@@ -5629,7 +5630,7 @@
                     <a:bodyPr/>
                     <a:lstStyle/>
                     <a:p>
-                      <a:pPr algn="ctr" indent="0" marL="0">
+                      <a:pPr rtl="1" algn="ctr" indent="0" marL="0">
                         <a:buNone/>
                       </a:pPr>
                       <a:r>
@@ -6717,7 +6718,7 @@
                     <a:bodyPr/>
                     <a:lstStyle/>
                     <a:p>
-                      <a:pPr algn="ctr" indent="0" marL="0">
+                      <a:pPr rtl="1" algn="ctr" indent="0" marL="0">
                         <a:buNone/>
                       </a:pPr>
                       <a:r>
@@ -6785,7 +6786,7 @@
                     <a:bodyPr/>
                     <a:lstStyle/>
                     <a:p>
-                      <a:pPr algn="ctr" indent="0" marL="0">
+                      <a:pPr rtl="1" algn="ctr" indent="0" marL="0">
                         <a:buNone/>
                       </a:pPr>
                       <a:r>
@@ -6853,7 +6854,7 @@
                     <a:bodyPr/>
                     <a:lstStyle/>
                     <a:p>
-                      <a:pPr algn="ctr" indent="0" marL="0">
+                      <a:pPr rtl="1" algn="ctr" indent="0" marL="0">
                         <a:buNone/>
                       </a:pPr>
                       <a:r>
@@ -6923,7 +6924,7 @@
                     <a:bodyPr/>
                     <a:lstStyle/>
                     <a:p>
-                      <a:pPr algn="r" indent="0" marL="0">
+                      <a:pPr rtl="1" algn="r" indent="0" marL="0">
                         <a:buNone/>
                       </a:pPr>
                       <a:r>
@@ -6991,7 +6992,7 @@
                     <a:bodyPr/>
                     <a:lstStyle/>
                     <a:p>
-                      <a:pPr algn="ctr" indent="0" marL="0">
+                      <a:pPr rtl="1" algn="ctr" indent="0" marL="0">
                         <a:buNone/>
                       </a:pPr>
                       <a:r>
@@ -7059,7 +7060,7 @@
                     <a:bodyPr/>
                     <a:lstStyle/>
                     <a:p>
-                      <a:pPr algn="ctr" indent="0" marL="0">
+                      <a:pPr rtl="1" algn="ctr" indent="0" marL="0">
                         <a:buNone/>
                       </a:pPr>
                       <a:r>
@@ -7129,7 +7130,7 @@
                     <a:bodyPr/>
                     <a:lstStyle/>
                     <a:p>
-                      <a:pPr algn="r" indent="0" marL="0">
+                      <a:pPr rtl="1" algn="r" indent="0" marL="0">
                         <a:buNone/>
                       </a:pPr>
                       <a:r>
@@ -7197,7 +7198,7 @@
                     <a:bodyPr/>
                     <a:lstStyle/>
                     <a:p>
-                      <a:pPr algn="ctr" indent="0" marL="0">
+                      <a:pPr rtl="1" algn="ctr" indent="0" marL="0">
                         <a:buNone/>
                       </a:pPr>
                       <a:r>
@@ -7265,7 +7266,7 @@
                     <a:bodyPr/>
                     <a:lstStyle/>
                     <a:p>
-                      <a:pPr algn="ctr" indent="0" marL="0">
+                      <a:pPr rtl="1" algn="ctr" indent="0" marL="0">
                         <a:buNone/>
                       </a:pPr>
                       <a:r>
@@ -7335,7 +7336,7 @@
                     <a:bodyPr/>
                     <a:lstStyle/>
                     <a:p>
-                      <a:pPr algn="r" indent="0" marL="0">
+                      <a:pPr rtl="1" algn="r" indent="0" marL="0">
                         <a:buNone/>
                       </a:pPr>
                       <a:r>
@@ -7403,7 +7404,7 @@
                     <a:bodyPr/>
                     <a:lstStyle/>
                     <a:p>
-                      <a:pPr algn="ctr" indent="0" marL="0">
+                      <a:pPr rtl="1" algn="ctr" indent="0" marL="0">
                         <a:buNone/>
                       </a:pPr>
                       <a:r>
@@ -7471,7 +7472,7 @@
                     <a:bodyPr/>
                     <a:lstStyle/>
                     <a:p>
-                      <a:pPr algn="ctr" indent="0" marL="0">
+                      <a:pPr rtl="1" algn="ctr" indent="0" marL="0">
                         <a:buNone/>
                       </a:pPr>
                       <a:r>
@@ -10065,7 +10066,7 @@
               <a:buNone/>
             </a:pPr>
             <a:r>
-              <a:rPr lang="en-US" sz="1250" b="1" spc="150" kern="0" dirty="0">
+              <a:rPr lang="fa-IR" sz="1250" b="1" spc="150" kern="0" dirty="0">
                 <a:solidFill>
                   <a:srgbClr val="2F3690"/>
                 </a:solidFill>
@@ -10075,7 +10076,7 @@
               </a:rPr>
               <a:t>جریان ریوارد بلاک</a:t>
             </a:r>
-            <a:endParaRPr lang="en-US" sz="1250" dirty="0"/>
+            <a:endParaRPr lang="fa-IR" sz="1250" dirty="0"/>
           </a:p>
         </p:txBody>
       </p:sp>
@@ -10104,7 +10105,7 @@
               <a:buNone/>
             </a:pPr>
             <a:r>
-              <a:rPr lang="en-US" sz="2500" b="1" dirty="0">
+              <a:rPr lang="fa-IR" sz="2500" b="1" dirty="0">
                 <a:solidFill>
                   <a:srgbClr val="1B1B2F"/>
                 </a:solidFill>
@@ -10114,7 +10115,7 @@
               </a:rPr>
               <a:t>توزیع ریوارد جاری — هر بلاک ۲ سورن</a:t>
             </a:r>
-            <a:endParaRPr lang="en-US" sz="2500" dirty="0"/>
+            <a:endParaRPr lang="fa-IR" sz="2500" dirty="0"/>
           </a:p>
         </p:txBody>
       </p:sp>
@@ -10146,7 +10147,7 @@
               <a:buNone/>
             </a:pPr>
             <a:r>
-              <a:rPr lang="en-US" sz="1400" dirty="0">
+              <a:rPr lang="fa-IR" sz="1400" dirty="0">
                 <a:solidFill>
                   <a:srgbClr val="1B1B2F"/>
                 </a:solidFill>
@@ -10156,7 +10157,7 @@
               </a:rPr>
               <a:t>◆  ۲ سورن هر بلاک، مستقیم و خودکار به BlockRewardDistributor واریز می‌شود (بدون فراخوانی قرارداد)</a:t>
             </a:r>
-            <a:endParaRPr lang="en-US" sz="1400" dirty="0"/>
+            <a:endParaRPr lang="fa-IR" sz="1400" dirty="0"/>
           </a:p>
           <a:p>
             <a:pPr rtl="1" algn="r" indent="0" marL="0">
@@ -10166,7 +10167,7 @@
               <a:buNone/>
             </a:pPr>
             <a:r>
-              <a:rPr lang="en-US" sz="1400" dirty="0">
+              <a:rPr lang="fa-IR" sz="1400" dirty="0">
                 <a:solidFill>
                   <a:srgbClr val="1B1B2F"/>
                 </a:solidFill>
@@ -10176,7 +10177,7 @@
               </a:rPr>
               <a:t>◆  ۱۵٪ ثابت → بنیاد؛ ۵۰٪ پیش‌فرض (حکمرانی‌شونده، ۴۰-۶۵٪) → مستقیم بین ولیدیتورها؛ ۳۵٪ باقی‌مانده → خزانه‌ی مشترک ولیدیتورها (ValidatorsTreasury)</a:t>
             </a:r>
-            <a:endParaRPr lang="en-US" sz="1400" dirty="0"/>
+            <a:endParaRPr lang="fa-IR" sz="1400" dirty="0"/>
           </a:p>
           <a:p>
             <a:pPr rtl="1" algn="r" indent="0" marL="0">
@@ -10186,7 +10187,7 @@
               <a:buNone/>
             </a:pPr>
             <a:r>
-              <a:rPr lang="en-US" sz="1400" dirty="0">
+              <a:rPr lang="fa-IR" sz="1400" dirty="0">
                 <a:solidFill>
                   <a:srgbClr val="1B1B2F"/>
                 </a:solidFill>
@@ -10196,7 +10197,7 @@
               </a:rPr>
               <a:t>◆  از فی معمولی تراکنش‌ها: ۳۰٪ سوزانده می‌شود، ۷۰٪ + ۱۰۰٪ کارمزد عضویت → بین تولیدکنندگان بلاک‌های بازه، به نسبت بلاک؛ خروج/تعلیق بعدی پاداش کار قبلی را حذف نمی‌کند</a:t>
             </a:r>
-            <a:endParaRPr lang="en-US" sz="1400" dirty="0"/>
+            <a:endParaRPr lang="fa-IR" sz="1400" dirty="0"/>
           </a:p>
           <a:p>
             <a:pPr rtl="1" algn="r" indent="0" marL="0">
@@ -10206,7 +10207,7 @@
               <a:buNone/>
             </a:pPr>
             <a:r>
-              <a:rPr lang="en-US" sz="1400" dirty="0">
+              <a:rPr lang="fa-IR" sz="1400" dirty="0">
                 <a:solidFill>
                   <a:srgbClr val="1B1B2F"/>
                 </a:solidFill>
@@ -10216,7 +10217,7 @@
               </a:rPr>
               <a:t>◆  این توزیع را سرویس آف‌چین RewardRouter هر ۲۳ ساعت محاسبه و اجرا می‌کند</a:t>
             </a:r>
-            <a:endParaRPr lang="en-US" sz="1400" dirty="0"/>
+            <a:endParaRPr lang="fa-IR" sz="1400" dirty="0"/>
           </a:p>
         </p:txBody>
       </p:sp>
@@ -10293,7 +10294,7 @@
               <a:buNone/>
             </a:pPr>
             <a:r>
-              <a:rPr lang="en-US" sz="1000" dirty="0">
+              <a:rPr lang="fa-IR" sz="1000" dirty="0">
                 <a:solidFill>
                   <a:srgbClr val="8B93B0"/>
                 </a:solidFill>
@@ -10303,7 +10304,7 @@
               </a:rPr>
               <a:t>بلاک‌چین سور — ارائه به هیأت‌مدیره‌ی بنیاد</a:t>
             </a:r>
-            <a:endParaRPr lang="en-US" sz="1000" dirty="0"/>
+            <a:endParaRPr lang="fa-IR" sz="1000" dirty="0"/>
           </a:p>
         </p:txBody>
       </p:sp>
@@ -10332,7 +10333,7 @@
               <a:buNone/>
             </a:pPr>
             <a:r>
-              <a:rPr lang="en-US" sz="1000" dirty="0">
+              <a:rPr lang="fa-IR" sz="1000" dirty="0">
                 <a:solidFill>
                   <a:srgbClr val="8B93B0"/>
                 </a:solidFill>
@@ -10342,7 +10343,7 @@
               </a:rPr>
               <a:t>16</a:t>
             </a:r>
-            <a:endParaRPr lang="en-US" sz="1000" dirty="0"/>
+            <a:endParaRPr lang="fa-IR" sz="1000" dirty="0"/>
           </a:p>
         </p:txBody>
       </p:sp>
@@ -12030,7 +12031,7 @@
                     <a:bodyPr/>
                     <a:lstStyle/>
                     <a:p>
-                      <a:pPr algn="ctr" indent="0" marL="0">
+                      <a:pPr rtl="1" algn="ctr" indent="0" marL="0">
                         <a:buNone/>
                       </a:pPr>
                       <a:r>
@@ -12098,7 +12099,7 @@
                     <a:bodyPr/>
                     <a:lstStyle/>
                     <a:p>
-                      <a:pPr algn="ctr" indent="0" marL="0">
+                      <a:pPr rtl="1" algn="ctr" indent="0" marL="0">
                         <a:buNone/>
                       </a:pPr>
                       <a:r>
@@ -12168,7 +12169,7 @@
                     <a:bodyPr/>
                     <a:lstStyle/>
                     <a:p>
-                      <a:pPr algn="r" indent="0" marL="0">
+                      <a:pPr rtl="1" algn="r" indent="0" marL="0">
                         <a:buNone/>
                       </a:pPr>
                       <a:r>
@@ -12236,7 +12237,7 @@
                     <a:bodyPr/>
                     <a:lstStyle/>
                     <a:p>
-                      <a:pPr algn="ctr" indent="0" marL="0">
+                      <a:pPr rtl="1" algn="ctr" indent="0" marL="0">
                         <a:buNone/>
                       </a:pPr>
                       <a:r>
@@ -12306,7 +12307,7 @@
                     <a:bodyPr/>
                     <a:lstStyle/>
                     <a:p>
-                      <a:pPr algn="r" indent="0" marL="0">
+                      <a:pPr rtl="1" algn="r" indent="0" marL="0">
                         <a:buNone/>
                       </a:pPr>
                       <a:r>
@@ -12374,7 +12375,7 @@
                     <a:bodyPr/>
                     <a:lstStyle/>
                     <a:p>
-                      <a:pPr algn="ctr" indent="0" marL="0">
+                      <a:pPr rtl="1" algn="ctr" indent="0" marL="0">
                         <a:buNone/>
                       </a:pPr>
                       <a:r>
@@ -12444,7 +12445,7 @@
                     <a:bodyPr/>
                     <a:lstStyle/>
                     <a:p>
-                      <a:pPr algn="r" indent="0" marL="0">
+                      <a:pPr rtl="1" algn="r" indent="0" marL="0">
                         <a:buNone/>
                       </a:pPr>
                       <a:r>
@@ -12512,7 +12513,7 @@
                     <a:bodyPr/>
                     <a:lstStyle/>
                     <a:p>
-                      <a:pPr algn="ctr" indent="0" marL="0">
+                      <a:pPr rtl="1" algn="ctr" indent="0" marL="0">
                         <a:buNone/>
                       </a:pPr>
                       <a:r>
@@ -12582,7 +12583,7 @@
                     <a:bodyPr/>
                     <a:lstStyle/>
                     <a:p>
-                      <a:pPr algn="r" indent="0" marL="0">
+                      <a:pPr rtl="1" algn="r" indent="0" marL="0">
                         <a:buNone/>
                       </a:pPr>
                       <a:r>
@@ -12650,7 +12651,7 @@
                     <a:bodyPr/>
                     <a:lstStyle/>
                     <a:p>
-                      <a:pPr algn="ctr" indent="0" marL="0">
+                      <a:pPr rtl="1" algn="ctr" indent="0" marL="0">
                         <a:buNone/>
                       </a:pPr>
                       <a:r>
@@ -12720,7 +12721,7 @@
                     <a:bodyPr/>
                     <a:lstStyle/>
                     <a:p>
-                      <a:pPr algn="r" indent="0" marL="0">
+                      <a:pPr rtl="1" algn="r" indent="0" marL="0">
                         <a:buNone/>
                       </a:pPr>
                       <a:r>
@@ -12788,7 +12789,7 @@
                     <a:bodyPr/>
                     <a:lstStyle/>
                     <a:p>
-                      <a:pPr algn="ctr" indent="0" marL="0">
+                      <a:pPr rtl="1" algn="ctr" indent="0" marL="0">
                         <a:buNone/>
                       </a:pPr>
                       <a:r>
@@ -12858,7 +12859,7 @@
                     <a:bodyPr/>
                     <a:lstStyle/>
                     <a:p>
-                      <a:pPr algn="r" indent="0" marL="0">
+                      <a:pPr rtl="1" algn="r" indent="0" marL="0">
                         <a:buNone/>
                       </a:pPr>
                       <a:r>
@@ -12926,7 +12927,7 @@
                     <a:bodyPr/>
                     <a:lstStyle/>
                     <a:p>
-                      <a:pPr algn="ctr" indent="0" marL="0">
+                      <a:pPr rtl="1" algn="ctr" indent="0" marL="0">
                         <a:buNone/>
                       </a:pPr>
                       <a:r>
@@ -19894,7 +19895,7 @@
                     <a:bodyPr/>
                     <a:lstStyle/>
                     <a:p>
-                      <a:pPr algn="ctr" indent="0" marL="0">
+                      <a:pPr rtl="1" algn="ctr" indent="0" marL="0">
                         <a:buNone/>
                       </a:pPr>
                       <a:r>
@@ -19962,7 +19963,7 @@
                     <a:bodyPr/>
                     <a:lstStyle/>
                     <a:p>
-                      <a:pPr algn="ctr" indent="0" marL="0">
+                      <a:pPr rtl="1" algn="ctr" indent="0" marL="0">
                         <a:buNone/>
                       </a:pPr>
                       <a:r>
@@ -20032,7 +20033,7 @@
                     <a:bodyPr/>
                     <a:lstStyle/>
                     <a:p>
-                      <a:pPr algn="r" indent="0" marL="0">
+                      <a:pPr rtl="1" algn="r" indent="0" marL="0">
                         <a:buNone/>
                       </a:pPr>
                       <a:r>
@@ -20100,7 +20101,7 @@
                     <a:bodyPr/>
                     <a:lstStyle/>
                     <a:p>
-                      <a:pPr algn="ctr" indent="0" marL="0">
+                      <a:pPr rtl="1" algn="ctr" indent="0" marL="0">
                         <a:buNone/>
                       </a:pPr>
                       <a:r>
@@ -20170,7 +20171,7 @@
                     <a:bodyPr/>
                     <a:lstStyle/>
                     <a:p>
-                      <a:pPr algn="r" indent="0" marL="0">
+                      <a:pPr rtl="1" algn="r" indent="0" marL="0">
                         <a:buNone/>
                       </a:pPr>
                       <a:r>
@@ -20238,7 +20239,7 @@
                     <a:bodyPr/>
                     <a:lstStyle/>
                     <a:p>
-                      <a:pPr algn="ctr" indent="0" marL="0">
+                      <a:pPr rtl="1" algn="ctr" indent="0" marL="0">
                         <a:buNone/>
                       </a:pPr>
                       <a:r>
@@ -20308,7 +20309,7 @@
                     <a:bodyPr/>
                     <a:lstStyle/>
                     <a:p>
-                      <a:pPr algn="r" indent="0" marL="0">
+                      <a:pPr rtl="1" algn="r" indent="0" marL="0">
                         <a:buNone/>
                       </a:pPr>
                       <a:r>
@@ -20376,7 +20377,7 @@
                     <a:bodyPr/>
                     <a:lstStyle/>
                     <a:p>
-                      <a:pPr algn="ctr" indent="0" marL="0">
+                      <a:pPr rtl="1" algn="ctr" indent="0" marL="0">
                         <a:buNone/>
                       </a:pPr>
                       <a:r>
@@ -20446,7 +20447,7 @@
                     <a:bodyPr/>
                     <a:lstStyle/>
                     <a:p>
-                      <a:pPr algn="r" indent="0" marL="0">
+                      <a:pPr rtl="1" algn="r" indent="0" marL="0">
                         <a:buNone/>
                       </a:pPr>
                       <a:r>
@@ -20514,7 +20515,7 @@
                     <a:bodyPr/>
                     <a:lstStyle/>
                     <a:p>
-                      <a:pPr algn="ctr" indent="0" marL="0">
+                      <a:pPr rtl="1" algn="ctr" indent="0" marL="0">
                         <a:buNone/>
                       </a:pPr>
                       <a:r>
@@ -20584,7 +20585,7 @@
                     <a:bodyPr/>
                     <a:lstStyle/>
                     <a:p>
-                      <a:pPr algn="r" indent="0" marL="0">
+                      <a:pPr rtl="1" algn="r" indent="0" marL="0">
                         <a:buNone/>
                       </a:pPr>
                       <a:r>
@@ -20652,7 +20653,7 @@
                     <a:bodyPr/>
                     <a:lstStyle/>
                     <a:p>
-                      <a:pPr algn="ctr" indent="0" marL="0">
+                      <a:pPr rtl="1" algn="ctr" indent="0" marL="0">
                         <a:buNone/>
                       </a:pPr>
                       <a:r>
@@ -20722,7 +20723,7 @@
                     <a:bodyPr/>
                     <a:lstStyle/>
                     <a:p>
-                      <a:pPr algn="r" indent="0" marL="0">
+                      <a:pPr rtl="1" algn="r" indent="0" marL="0">
                         <a:buNone/>
                       </a:pPr>
                       <a:r>
@@ -20790,7 +20791,7 @@
                     <a:bodyPr/>
                     <a:lstStyle/>
                     <a:p>
-                      <a:pPr algn="ctr" indent="0" marL="0">
+                      <a:pPr rtl="1" algn="ctr" indent="0" marL="0">
                         <a:buNone/>
                       </a:pPr>
                       <a:r>
@@ -21163,6 +21164,1238 @@
               <a:t>فهرست کامل تصمیمات باز در سند «sur-master-open-items.md» موجود است — آماده‌ی پاسخ به سؤالات هیأت‌مدیره هستیم.</a:t>
             </a:r>
             <a:endParaRPr lang="en-US" sz="1500" dirty="0"/>
+          </a:p>
+        </p:txBody>
+      </p:sp>
+    </p:spTree>
+  </p:cSld>
+  <p:clrMapOvr>
+    <a:masterClrMapping/>
+  </p:clrMapOvr>
+</p:sld>
+</file>
+
+<file path=ppt/slides/slide36.xml><?xml version="1.0" encoding="utf-8"?>
+<p:sld xmlns:a="http://schemas.openxmlformats.org/drawingml/2006/main" xmlns:r="http://schemas.openxmlformats.org/officeDocument/2006/relationships" xmlns:p="http://schemas.openxmlformats.org/presentationml/2006/main">
+  <p:cSld name="Slide 34">
+    <p:bg>
+      <p:bgPr>
+        <a:solidFill>
+          <a:srgbClr val="FFFFFF"/>
+        </a:solidFill>
+      </p:bgPr>
+    </p:bg>
+    <p:spTree>
+      <p:nvGrpSpPr>
+        <p:cNvPr id="1" name=""/>
+        <p:cNvGrpSpPr/>
+        <p:nvPr/>
+      </p:nvGrpSpPr>
+      <p:grpSpPr>
+        <a:xfrm>
+          <a:off x="0" y="0"/>
+          <a:ext cx="0" cy="0"/>
+          <a:chOff x="0" y="0"/>
+          <a:chExt cx="0" cy="0"/>
+        </a:xfrm>
+      </p:grpSpPr>
+      <p:sp>
+        <p:nvSpPr>
+          <p:cNvPr id="2" name="Text 0"/>
+          <p:cNvSpPr txBox="1"/>
+          <p:nvPr/>
+        </p:nvSpPr>
+        <p:spPr>
+          <a:xfrm>
+            <a:off x="548640" y="292608"/>
+            <a:ext cx="11064240" cy="320040"/>
+          </a:xfrm>
+          <a:prstGeom prst="rect">
+            <a:avLst/>
+          </a:prstGeom>
+          <a:noFill/>
+          <a:ln/>
+        </p:spPr>
+        <p:txBody>
+          <a:bodyPr wrap="square" lIns="0" tIns="0" rIns="0" bIns="0" rtlCol="0" anchor="ctr"/>
+          <a:lstStyle/>
+          <a:p>
+            <a:pPr rtl="1" algn="r" indent="0" marL="0">
+              <a:buNone/>
+            </a:pPr>
+            <a:r>
+              <a:rPr lang="fa-IR" sz="1250" b="1" spc="150" kern="0" dirty="0">
+                <a:solidFill>
+                  <a:srgbClr val="2F3690"/>
+                </a:solidFill>
+                <a:latin typeface="Calibri" pitchFamily="34" charset="0"/>
+                <a:ea typeface="Calibri" pitchFamily="34" charset="-122"/>
+                <a:cs typeface="Calibri" pitchFamily="34" charset="-120"/>
+              </a:rPr>
+              <a:t>جمع‌بندی (ادامه)</a:t>
+            </a:r>
+            <a:endParaRPr lang="fa-IR" sz="1250" dirty="0"/>
+          </a:p>
+        </p:txBody>
+      </p:sp>
+      <p:sp>
+        <p:nvSpPr>
+          <p:cNvPr id="3" name="Text 1"/>
+          <p:cNvSpPr txBox="1"/>
+          <p:nvPr/>
+        </p:nvSpPr>
+        <p:spPr>
+          <a:xfrm>
+            <a:off x="548640" y="576072"/>
+            <a:ext cx="11064240" cy="685800"/>
+          </a:xfrm>
+          <a:prstGeom prst="rect">
+            <a:avLst/>
+          </a:prstGeom>
+          <a:noFill/>
+          <a:ln/>
+        </p:spPr>
+        <p:txBody>
+          <a:bodyPr wrap="square" lIns="0" tIns="0" rIns="0" bIns="0" rtlCol="0" anchor="ctr"/>
+          <a:lstStyle/>
+          <a:p>
+            <a:pPr rtl="1" algn="r" indent="0" marL="0">
+              <a:buNone/>
+            </a:pPr>
+            <a:r>
+              <a:rPr lang="fa-IR" sz="2500" b="1" dirty="0">
+                <a:solidFill>
+                  <a:srgbClr val="1B1B2F"/>
+                </a:solidFill>
+                <a:latin typeface="Cambria" pitchFamily="34" charset="0"/>
+                <a:ea typeface="Cambria" pitchFamily="34" charset="-122"/>
+                <a:cs typeface="Cambria" pitchFamily="34" charset="-120"/>
+              </a:rPr>
+              <a:t>موضوعات نیازمند تصمیم</a:t>
+            </a:r>
+            <a:endParaRPr lang="fa-IR" sz="2500" dirty="0"/>
+          </a:p>
+        </p:txBody>
+      </p:sp>
+      <p:graphicFrame>
+        <p:nvGraphicFramePr>
+          <p:cNvPr id="35" name="Table 0"/>
+          <p:cNvGraphicFramePr>
+            <a:graphicFrameLocks noGrp="1"/>
+          </p:cNvGraphicFramePr>
+          <p:nvPr>
+            <p:extLst>
+              <p:ext uri="{D42A27DB-BD31-4B8C-83A1-F6EECF244321}">
+                <p14:modId xmlns:p14="http://schemas.microsoft.com/office/powerpoint/2010/main" val="1579011935"/>
+              </p:ext>
+            </p:extLst>
+          </p:nvPr>
+        </p:nvGraphicFramePr>
+        <p:xfrm>
+          <a:off x="548640" y="1600200"/>
+          <a:ext cx="11064240" cy="4663440"/>
+        </p:xfrm>
+        <a:graphic>
+          <a:graphicData uri="http://schemas.openxmlformats.org/drawingml/2006/table">
+            <a:tbl>
+              <a:tblPr/>
+              <a:tblGrid>
+                <a:gridCol w="5532120"/>
+                <a:gridCol w="5532120"/>
+              </a:tblGrid>
+              <a:tr h="666206">
+                <a:tc>
+                  <a:txBody>
+                    <a:bodyPr/>
+                    <a:lstStyle/>
+                    <a:p>
+                      <a:pPr rtl="1" algn="ctr" indent="0" marL="0">
+                        <a:buNone/>
+                      </a:pPr>
+                      <a:r>
+                        <a:rPr lang="fa-IR" sz="1200" b="1" dirty="0">
+                          <a:solidFill>
+                            <a:srgbClr val="FFFFFF"/>
+                          </a:solidFill>
+                          <a:latin typeface="Calibri" pitchFamily="34" charset="0"/>
+                          <a:ea typeface="Calibri" pitchFamily="34" charset="-122"/>
+                          <a:cs typeface="Calibri" pitchFamily="34" charset="-120"/>
+                        </a:rPr>
+                        <a:t>موضوع</a:t>
+                      </a:r>
+                      <a:endParaRPr lang="fa-IR" sz="1200" dirty="0">
+                        <a:latin typeface="Calibri" charset="0"/>
+                        <a:ea typeface="Calibri" charset="0"/>
+                        <a:cs typeface="Calibri" charset="0"/>
+                      </a:endParaRPr>
+                    </a:p>
+                  </a:txBody>
+                  <a:tcPr marL="91440" marR="91440" marT="45720" marB="45720" anchor="ctr">
+                    <a:lnL w="6350" cap="flat" cmpd="sng" algn="ctr">
+                      <a:solidFill>
+                        <a:srgbClr val="E5E8F0"/>
+                      </a:solidFill>
+                      <a:prstDash val="solid"/>
+                      <a:round/>
+                      <a:headEnd type="none" w="med" len="med"/>
+                      <a:tailEnd type="none" w="med" len="med"/>
+                    </a:lnL>
+                    <a:lnR w="6350" cap="flat" cmpd="sng" algn="ctr">
+                      <a:solidFill>
+                        <a:srgbClr val="E5E8F0"/>
+                      </a:solidFill>
+                      <a:prstDash val="solid"/>
+                      <a:round/>
+                      <a:headEnd type="none" w="med" len="med"/>
+                      <a:tailEnd type="none" w="med" len="med"/>
+                    </a:lnR>
+                    <a:lnT w="6350" cap="flat" cmpd="sng" algn="ctr">
+                      <a:solidFill>
+                        <a:srgbClr val="E5E8F0"/>
+                      </a:solidFill>
+                      <a:prstDash val="solid"/>
+                      <a:round/>
+                      <a:headEnd type="none" w="med" len="med"/>
+                      <a:tailEnd type="none" w="med" len="med"/>
+                    </a:lnT>
+                    <a:lnB w="6350" cap="flat" cmpd="sng" algn="ctr">
+                      <a:solidFill>
+                        <a:srgbClr val="E5E8F0"/>
+                      </a:solidFill>
+                      <a:prstDash val="solid"/>
+                      <a:round/>
+                      <a:headEnd type="none" w="med" len="med"/>
+                      <a:tailEnd type="none" w="med" len="med"/>
+                    </a:lnB>
+                    <a:solidFill>
+                      <a:srgbClr val="2F3690"/>
+                    </a:solidFill>
+                  </a:tcPr>
+                </a:tc>
+                <a:tc>
+                  <a:txBody>
+                    <a:bodyPr/>
+                    <a:lstStyle/>
+                    <a:p>
+                      <a:pPr rtl="1" algn="ctr" indent="0" marL="0">
+                        <a:buNone/>
+                      </a:pPr>
+                      <a:r>
+                        <a:rPr lang="fa-IR" sz="1200" b="1" dirty="0">
+                          <a:solidFill>
+                            <a:srgbClr val="FFFFFF"/>
+                          </a:solidFill>
+                          <a:latin typeface="Calibri" pitchFamily="34" charset="0"/>
+                          <a:ea typeface="Calibri" pitchFamily="34" charset="-122"/>
+                          <a:cs typeface="Calibri" pitchFamily="34" charset="-120"/>
+                        </a:rPr>
+                        <a:t>وضعیت</a:t>
+                      </a:r>
+                      <a:endParaRPr lang="fa-IR" sz="1200" dirty="0">
+                        <a:latin typeface="Calibri" charset="0"/>
+                        <a:ea typeface="Calibri" charset="0"/>
+                        <a:cs typeface="Calibri" charset="0"/>
+                      </a:endParaRPr>
+                    </a:p>
+                  </a:txBody>
+                  <a:tcPr marL="91440" marR="91440" marT="45720" marB="45720" anchor="ctr">
+                    <a:lnL w="6350" cap="flat" cmpd="sng" algn="ctr">
+                      <a:solidFill>
+                        <a:srgbClr val="E5E8F0"/>
+                      </a:solidFill>
+                      <a:prstDash val="solid"/>
+                      <a:round/>
+                      <a:headEnd type="none" w="med" len="med"/>
+                      <a:tailEnd type="none" w="med" len="med"/>
+                    </a:lnL>
+                    <a:lnR w="6350" cap="flat" cmpd="sng" algn="ctr">
+                      <a:solidFill>
+                        <a:srgbClr val="E5E8F0"/>
+                      </a:solidFill>
+                      <a:prstDash val="solid"/>
+                      <a:round/>
+                      <a:headEnd type="none" w="med" len="med"/>
+                      <a:tailEnd type="none" w="med" len="med"/>
+                    </a:lnR>
+                    <a:lnT w="6350" cap="flat" cmpd="sng" algn="ctr">
+                      <a:solidFill>
+                        <a:srgbClr val="E5E8F0"/>
+                      </a:solidFill>
+                      <a:prstDash val="solid"/>
+                      <a:round/>
+                      <a:headEnd type="none" w="med" len="med"/>
+                      <a:tailEnd type="none" w="med" len="med"/>
+                    </a:lnT>
+                    <a:lnB w="6350" cap="flat" cmpd="sng" algn="ctr">
+                      <a:solidFill>
+                        <a:srgbClr val="E5E8F0"/>
+                      </a:solidFill>
+                      <a:prstDash val="solid"/>
+                      <a:round/>
+                      <a:headEnd type="none" w="med" len="med"/>
+                      <a:tailEnd type="none" w="med" len="med"/>
+                    </a:lnB>
+                    <a:solidFill>
+                      <a:srgbClr val="2F3690"/>
+                    </a:solidFill>
+                  </a:tcPr>
+                </a:tc>
+              </a:tr>
+              <a:tr h="666206">
+                <a:tc>
+                  <a:txBody>
+                    <a:bodyPr/>
+                    <a:lstStyle/>
+                    <a:p>
+                      <a:pPr rtl="1" algn="r" indent="0" marL="0">
+                        <a:buNone/>
+                      </a:pPr>
+                      <a:r>
+                        <a:rPr lang="fa-IR" sz="1200" dirty="0">
+                          <a:solidFill>
+                            <a:srgbClr val="1B1B2F"/>
+                          </a:solidFill>
+                          <a:latin typeface="Calibri" pitchFamily="34" charset="0"/>
+                          <a:ea typeface="Calibri" pitchFamily="34" charset="-122"/>
+                          <a:cs typeface="Calibri" pitchFamily="34" charset="-120"/>
+                        </a:rPr>
+                        <a:t>N04 — حذف غیرتنبیهی نود مفقود؛ هویت هفت مسئول</a:t>
+                      </a:r>
+                      <a:endParaRPr lang="fa-IR" sz="1200" dirty="0">
+                        <a:latin typeface="Calibri" charset="0"/>
+                        <a:ea typeface="Calibri" charset="0"/>
+                        <a:cs typeface="Calibri" charset="0"/>
+                      </a:endParaRPr>
+                    </a:p>
+                  </a:txBody>
+                  <a:tcPr marL="91440" marR="91440" marT="45720" marB="45720" anchor="ctr">
+                    <a:lnL w="6350" cap="flat" cmpd="sng" algn="ctr">
+                      <a:solidFill>
+                        <a:srgbClr val="E5E8F0"/>
+                      </a:solidFill>
+                      <a:prstDash val="solid"/>
+                      <a:round/>
+                      <a:headEnd type="none" w="med" len="med"/>
+                      <a:tailEnd type="none" w="med" len="med"/>
+                    </a:lnL>
+                    <a:lnR w="6350" cap="flat" cmpd="sng" algn="ctr">
+                      <a:solidFill>
+                        <a:srgbClr val="E5E8F0"/>
+                      </a:solidFill>
+                      <a:prstDash val="solid"/>
+                      <a:round/>
+                      <a:headEnd type="none" w="med" len="med"/>
+                      <a:tailEnd type="none" w="med" len="med"/>
+                    </a:lnR>
+                    <a:lnT w="6350" cap="flat" cmpd="sng" algn="ctr">
+                      <a:solidFill>
+                        <a:srgbClr val="E5E8F0"/>
+                      </a:solidFill>
+                      <a:prstDash val="solid"/>
+                      <a:round/>
+                      <a:headEnd type="none" w="med" len="med"/>
+                      <a:tailEnd type="none" w="med" len="med"/>
+                    </a:lnT>
+                    <a:lnB w="6350" cap="flat" cmpd="sng" algn="ctr">
+                      <a:solidFill>
+                        <a:srgbClr val="E5E8F0"/>
+                      </a:solidFill>
+                      <a:prstDash val="solid"/>
+                      <a:round/>
+                      <a:headEnd type="none" w="med" len="med"/>
+                      <a:tailEnd type="none" w="med" len="med"/>
+                    </a:lnB>
+                    <a:solidFill>
+                      <a:srgbClr val="FFFFFF"/>
+                    </a:solidFill>
+                  </a:tcPr>
+                </a:tc>
+                <a:tc>
+                  <a:txBody>
+                    <a:bodyPr/>
+                    <a:lstStyle/>
+                    <a:p>
+                      <a:pPr rtl="1" algn="ctr" indent="0" marL="0">
+                        <a:buNone/>
+                      </a:pPr>
+                      <a:r>
+                        <a:rPr lang="fa-IR" sz="1200" dirty="0">
+                          <a:solidFill>
+                            <a:srgbClr val="1B1B2F"/>
+                          </a:solidFill>
+                          <a:latin typeface="Calibri" pitchFamily="34" charset="0"/>
+                          <a:ea typeface="Calibri" pitchFamily="34" charset="-122"/>
+                          <a:cs typeface="Calibri" pitchFamily="34" charset="-120"/>
+                        </a:rPr>
+                        <a:t>نیازمند تصمیم — گزینه‌ی B تأیید نشده؛ پیش‌فرض فعلی A</a:t>
+                      </a:r>
+                      <a:endParaRPr lang="fa-IR" sz="1200" dirty="0">
+                        <a:latin typeface="Calibri" charset="0"/>
+                        <a:ea typeface="Calibri" charset="0"/>
+                        <a:cs typeface="Calibri" charset="0"/>
+                      </a:endParaRPr>
+                    </a:p>
+                  </a:txBody>
+                  <a:tcPr marL="91440" marR="91440" marT="45720" marB="45720" anchor="ctr">
+                    <a:lnL w="6350" cap="flat" cmpd="sng" algn="ctr">
+                      <a:solidFill>
+                        <a:srgbClr val="E5E8F0"/>
+                      </a:solidFill>
+                      <a:prstDash val="solid"/>
+                      <a:round/>
+                      <a:headEnd type="none" w="med" len="med"/>
+                      <a:tailEnd type="none" w="med" len="med"/>
+                    </a:lnL>
+                    <a:lnR w="6350" cap="flat" cmpd="sng" algn="ctr">
+                      <a:solidFill>
+                        <a:srgbClr val="E5E8F0"/>
+                      </a:solidFill>
+                      <a:prstDash val="solid"/>
+                      <a:round/>
+                      <a:headEnd type="none" w="med" len="med"/>
+                      <a:tailEnd type="none" w="med" len="med"/>
+                    </a:lnR>
+                    <a:lnT w="6350" cap="flat" cmpd="sng" algn="ctr">
+                      <a:solidFill>
+                        <a:srgbClr val="E5E8F0"/>
+                      </a:solidFill>
+                      <a:prstDash val="solid"/>
+                      <a:round/>
+                      <a:headEnd type="none" w="med" len="med"/>
+                      <a:tailEnd type="none" w="med" len="med"/>
+                    </a:lnT>
+                    <a:lnB w="6350" cap="flat" cmpd="sng" algn="ctr">
+                      <a:solidFill>
+                        <a:srgbClr val="E5E8F0"/>
+                      </a:solidFill>
+                      <a:prstDash val="solid"/>
+                      <a:round/>
+                      <a:headEnd type="none" w="med" len="med"/>
+                      <a:tailEnd type="none" w="med" len="med"/>
+                    </a:lnB>
+                    <a:solidFill>
+                      <a:srgbClr val="FFFFFF"/>
+                    </a:solidFill>
+                  </a:tcPr>
+                </a:tc>
+              </a:tr>
+              <a:tr h="666206">
+                <a:tc>
+                  <a:txBody>
+                    <a:bodyPr/>
+                    <a:lstStyle/>
+                    <a:p>
+                      <a:pPr rtl="1" algn="r" indent="0" marL="0">
+                        <a:buNone/>
+                      </a:pPr>
+                      <a:r>
+                        <a:rPr lang="fa-IR" sz="1200" dirty="0">
+                          <a:solidFill>
+                            <a:srgbClr val="1B1B2F"/>
+                          </a:solidFill>
+                          <a:latin typeface="Calibri" pitchFamily="34" charset="0"/>
+                          <a:ea typeface="Calibri" pitchFamily="34" charset="-122"/>
+                          <a:cs typeface="Calibri" pitchFamily="34" charset="-120"/>
+                        </a:rPr>
+                        <a:t>کلید گم‌شده</a:t>
+                      </a:r>
+                      <a:endParaRPr lang="fa-IR" sz="1200" dirty="0">
+                        <a:latin typeface="Calibri" charset="0"/>
+                        <a:ea typeface="Calibri" charset="0"/>
+                        <a:cs typeface="Calibri" charset="0"/>
+                      </a:endParaRPr>
+                    </a:p>
+                  </a:txBody>
+                  <a:tcPr marL="91440" marR="91440" marT="45720" marB="45720" anchor="ctr">
+                    <a:lnL w="6350" cap="flat" cmpd="sng" algn="ctr">
+                      <a:solidFill>
+                        <a:srgbClr val="E5E8F0"/>
+                      </a:solidFill>
+                      <a:prstDash val="solid"/>
+                      <a:round/>
+                      <a:headEnd type="none" w="med" len="med"/>
+                      <a:tailEnd type="none" w="med" len="med"/>
+                    </a:lnL>
+                    <a:lnR w="6350" cap="flat" cmpd="sng" algn="ctr">
+                      <a:solidFill>
+                        <a:srgbClr val="E5E8F0"/>
+                      </a:solidFill>
+                      <a:prstDash val="solid"/>
+                      <a:round/>
+                      <a:headEnd type="none" w="med" len="med"/>
+                      <a:tailEnd type="none" w="med" len="med"/>
+                    </a:lnR>
+                    <a:lnT w="6350" cap="flat" cmpd="sng" algn="ctr">
+                      <a:solidFill>
+                        <a:srgbClr val="E5E8F0"/>
+                      </a:solidFill>
+                      <a:prstDash val="solid"/>
+                      <a:round/>
+                      <a:headEnd type="none" w="med" len="med"/>
+                      <a:tailEnd type="none" w="med" len="med"/>
+                    </a:lnT>
+                    <a:lnB w="6350" cap="flat" cmpd="sng" algn="ctr">
+                      <a:solidFill>
+                        <a:srgbClr val="E5E8F0"/>
+                      </a:solidFill>
+                      <a:prstDash val="solid"/>
+                      <a:round/>
+                      <a:headEnd type="none" w="med" len="med"/>
+                      <a:tailEnd type="none" w="med" len="med"/>
+                    </a:lnB>
+                    <a:solidFill>
+                      <a:srgbClr val="F7F9FC"/>
+                    </a:solidFill>
+                  </a:tcPr>
+                </a:tc>
+                <a:tc>
+                  <a:txBody>
+                    <a:bodyPr/>
+                    <a:lstStyle/>
+                    <a:p>
+                      <a:pPr rtl="1" algn="ctr" indent="0" marL="0">
+                        <a:buNone/>
+                      </a:pPr>
+                      <a:r>
+                        <a:rPr lang="fa-IR" sz="1200" dirty="0">
+                          <a:solidFill>
+                            <a:srgbClr val="1B1B2F"/>
+                          </a:solidFill>
+                          <a:latin typeface="Calibri" pitchFamily="34" charset="0"/>
+                          <a:ea typeface="Calibri" pitchFamily="34" charset="-122"/>
+                          <a:cs typeface="Calibri" pitchFamily="34" charset="-120"/>
+                        </a:rPr>
+                        <a:t>نیازمند تصمیم — مهاجرت هویت، وثیقه و جایگاه ولیدیتوری را منتقل نمی‌کند؛ مسیر انتقال هماهنگ عضویت طراحی نشده</a:t>
+                      </a:r>
+                      <a:endParaRPr lang="fa-IR" sz="1200" dirty="0">
+                        <a:latin typeface="Calibri" charset="0"/>
+                        <a:ea typeface="Calibri" charset="0"/>
+                        <a:cs typeface="Calibri" charset="0"/>
+                      </a:endParaRPr>
+                    </a:p>
+                  </a:txBody>
+                  <a:tcPr marL="91440" marR="91440" marT="45720" marB="45720" anchor="ctr">
+                    <a:lnL w="6350" cap="flat" cmpd="sng" algn="ctr">
+                      <a:solidFill>
+                        <a:srgbClr val="E5E8F0"/>
+                      </a:solidFill>
+                      <a:prstDash val="solid"/>
+                      <a:round/>
+                      <a:headEnd type="none" w="med" len="med"/>
+                      <a:tailEnd type="none" w="med" len="med"/>
+                    </a:lnL>
+                    <a:lnR w="6350" cap="flat" cmpd="sng" algn="ctr">
+                      <a:solidFill>
+                        <a:srgbClr val="E5E8F0"/>
+                      </a:solidFill>
+                      <a:prstDash val="solid"/>
+                      <a:round/>
+                      <a:headEnd type="none" w="med" len="med"/>
+                      <a:tailEnd type="none" w="med" len="med"/>
+                    </a:lnR>
+                    <a:lnT w="6350" cap="flat" cmpd="sng" algn="ctr">
+                      <a:solidFill>
+                        <a:srgbClr val="E5E8F0"/>
+                      </a:solidFill>
+                      <a:prstDash val="solid"/>
+                      <a:round/>
+                      <a:headEnd type="none" w="med" len="med"/>
+                      <a:tailEnd type="none" w="med" len="med"/>
+                    </a:lnT>
+                    <a:lnB w="6350" cap="flat" cmpd="sng" algn="ctr">
+                      <a:solidFill>
+                        <a:srgbClr val="E5E8F0"/>
+                      </a:solidFill>
+                      <a:prstDash val="solid"/>
+                      <a:round/>
+                      <a:headEnd type="none" w="med" len="med"/>
+                      <a:tailEnd type="none" w="med" len="med"/>
+                    </a:lnB>
+                    <a:solidFill>
+                      <a:srgbClr val="F7F9FC"/>
+                    </a:solidFill>
+                  </a:tcPr>
+                </a:tc>
+              </a:tr>
+              <a:tr h="666206">
+                <a:tc>
+                  <a:txBody>
+                    <a:bodyPr/>
+                    <a:lstStyle/>
+                    <a:p>
+                      <a:pPr rtl="1" algn="r" indent="0" marL="0">
+                        <a:buNone/>
+                      </a:pPr>
+                      <a:r>
+                        <a:rPr lang="fa-IR" sz="1200" dirty="0">
+                          <a:solidFill>
+                            <a:srgbClr val="1B1B2F"/>
+                          </a:solidFill>
+                          <a:latin typeface="Calibri" pitchFamily="34" charset="0"/>
+                          <a:ea typeface="Calibri" pitchFamily="34" charset="-122"/>
+                          <a:cs typeface="Calibri" pitchFamily="34" charset="-120"/>
+                        </a:rPr>
+                        <a:t>کلید سرقت‌شده</a:t>
+                      </a:r>
+                      <a:endParaRPr lang="fa-IR" sz="1200" dirty="0">
+                        <a:latin typeface="Calibri" charset="0"/>
+                        <a:ea typeface="Calibri" charset="0"/>
+                        <a:cs typeface="Calibri" charset="0"/>
+                      </a:endParaRPr>
+                    </a:p>
+                  </a:txBody>
+                  <a:tcPr marL="91440" marR="91440" marT="45720" marB="45720" anchor="ctr">
+                    <a:lnL w="6350" cap="flat" cmpd="sng" algn="ctr">
+                      <a:solidFill>
+                        <a:srgbClr val="E5E8F0"/>
+                      </a:solidFill>
+                      <a:prstDash val="solid"/>
+                      <a:round/>
+                      <a:headEnd type="none" w="med" len="med"/>
+                      <a:tailEnd type="none" w="med" len="med"/>
+                    </a:lnL>
+                    <a:lnR w="6350" cap="flat" cmpd="sng" algn="ctr">
+                      <a:solidFill>
+                        <a:srgbClr val="E5E8F0"/>
+                      </a:solidFill>
+                      <a:prstDash val="solid"/>
+                      <a:round/>
+                      <a:headEnd type="none" w="med" len="med"/>
+                      <a:tailEnd type="none" w="med" len="med"/>
+                    </a:lnR>
+                    <a:lnT w="6350" cap="flat" cmpd="sng" algn="ctr">
+                      <a:solidFill>
+                        <a:srgbClr val="E5E8F0"/>
+                      </a:solidFill>
+                      <a:prstDash val="solid"/>
+                      <a:round/>
+                      <a:headEnd type="none" w="med" len="med"/>
+                      <a:tailEnd type="none" w="med" len="med"/>
+                    </a:lnT>
+                    <a:lnB w="6350" cap="flat" cmpd="sng" algn="ctr">
+                      <a:solidFill>
+                        <a:srgbClr val="E5E8F0"/>
+                      </a:solidFill>
+                      <a:prstDash val="solid"/>
+                      <a:round/>
+                      <a:headEnd type="none" w="med" len="med"/>
+                      <a:tailEnd type="none" w="med" len="med"/>
+                    </a:lnB>
+                    <a:solidFill>
+                      <a:srgbClr val="FFFFFF"/>
+                    </a:solidFill>
+                  </a:tcPr>
+                </a:tc>
+                <a:tc>
+                  <a:txBody>
+                    <a:bodyPr/>
+                    <a:lstStyle/>
+                    <a:p>
+                      <a:pPr rtl="1" algn="ctr" indent="0" marL="0">
+                        <a:buNone/>
+                      </a:pPr>
+                      <a:r>
+                        <a:rPr lang="fa-IR" sz="1200" dirty="0">
+                          <a:solidFill>
+                            <a:srgbClr val="1B1B2F"/>
+                          </a:solidFill>
+                          <a:latin typeface="Calibri" pitchFamily="34" charset="0"/>
+                          <a:ea typeface="Calibri" pitchFamily="34" charset="-122"/>
+                          <a:cs typeface="Calibri" pitchFamily="34" charset="-120"/>
+                        </a:rPr>
+                        <a:t>نیازمند تصمیم — هیچ سازوکار ابطال کلید روی زنجیره وجود ندارد؛ مسئله‌ای جدا از کلید گم‌شده</a:t>
+                      </a:r>
+                      <a:endParaRPr lang="fa-IR" sz="1200" dirty="0">
+                        <a:latin typeface="Calibri" charset="0"/>
+                        <a:ea typeface="Calibri" charset="0"/>
+                        <a:cs typeface="Calibri" charset="0"/>
+                      </a:endParaRPr>
+                    </a:p>
+                  </a:txBody>
+                  <a:tcPr marL="91440" marR="91440" marT="45720" marB="45720" anchor="ctr">
+                    <a:lnL w="6350" cap="flat" cmpd="sng" algn="ctr">
+                      <a:solidFill>
+                        <a:srgbClr val="E5E8F0"/>
+                      </a:solidFill>
+                      <a:prstDash val="solid"/>
+                      <a:round/>
+                      <a:headEnd type="none" w="med" len="med"/>
+                      <a:tailEnd type="none" w="med" len="med"/>
+                    </a:lnL>
+                    <a:lnR w="6350" cap="flat" cmpd="sng" algn="ctr">
+                      <a:solidFill>
+                        <a:srgbClr val="E5E8F0"/>
+                      </a:solidFill>
+                      <a:prstDash val="solid"/>
+                      <a:round/>
+                      <a:headEnd type="none" w="med" len="med"/>
+                      <a:tailEnd type="none" w="med" len="med"/>
+                    </a:lnR>
+                    <a:lnT w="6350" cap="flat" cmpd="sng" algn="ctr">
+                      <a:solidFill>
+                        <a:srgbClr val="E5E8F0"/>
+                      </a:solidFill>
+                      <a:prstDash val="solid"/>
+                      <a:round/>
+                      <a:headEnd type="none" w="med" len="med"/>
+                      <a:tailEnd type="none" w="med" len="med"/>
+                    </a:lnT>
+                    <a:lnB w="6350" cap="flat" cmpd="sng" algn="ctr">
+                      <a:solidFill>
+                        <a:srgbClr val="E5E8F0"/>
+                      </a:solidFill>
+                      <a:prstDash val="solid"/>
+                      <a:round/>
+                      <a:headEnd type="none" w="med" len="med"/>
+                      <a:tailEnd type="none" w="med" len="med"/>
+                    </a:lnB>
+                    <a:solidFill>
+                      <a:srgbClr val="FFFFFF"/>
+                    </a:solidFill>
+                  </a:tcPr>
+                </a:tc>
+              </a:tr>
+              <a:tr h="666206">
+                <a:tc>
+                  <a:txBody>
+                    <a:bodyPr/>
+                    <a:lstStyle/>
+                    <a:p>
+                      <a:pPr rtl="1" algn="r" indent="0" marL="0">
+                        <a:buNone/>
+                      </a:pPr>
+                      <a:r>
+                        <a:rPr lang="fa-IR" sz="1200" dirty="0">
+                          <a:solidFill>
+                            <a:srgbClr val="1B1B2F"/>
+                          </a:solidFill>
+                          <a:latin typeface="Calibri" pitchFamily="34" charset="0"/>
+                          <a:ea typeface="Calibri" pitchFamily="34" charset="-122"/>
+                          <a:cs typeface="Calibri" pitchFamily="34" charset="-120"/>
+                        </a:rPr>
+                        <a:t>محصول و تقاضا</a:t>
+                      </a:r>
+                      <a:endParaRPr lang="fa-IR" sz="1200" dirty="0">
+                        <a:latin typeface="Calibri" charset="0"/>
+                        <a:ea typeface="Calibri" charset="0"/>
+                        <a:cs typeface="Calibri" charset="0"/>
+                      </a:endParaRPr>
+                    </a:p>
+                  </a:txBody>
+                  <a:tcPr marL="91440" marR="91440" marT="45720" marB="45720" anchor="ctr">
+                    <a:lnL w="6350" cap="flat" cmpd="sng" algn="ctr">
+                      <a:solidFill>
+                        <a:srgbClr val="E5E8F0"/>
+                      </a:solidFill>
+                      <a:prstDash val="solid"/>
+                      <a:round/>
+                      <a:headEnd type="none" w="med" len="med"/>
+                      <a:tailEnd type="none" w="med" len="med"/>
+                    </a:lnL>
+                    <a:lnR w="6350" cap="flat" cmpd="sng" algn="ctr">
+                      <a:solidFill>
+                        <a:srgbClr val="E5E8F0"/>
+                      </a:solidFill>
+                      <a:prstDash val="solid"/>
+                      <a:round/>
+                      <a:headEnd type="none" w="med" len="med"/>
+                      <a:tailEnd type="none" w="med" len="med"/>
+                    </a:lnR>
+                    <a:lnT w="6350" cap="flat" cmpd="sng" algn="ctr">
+                      <a:solidFill>
+                        <a:srgbClr val="E5E8F0"/>
+                      </a:solidFill>
+                      <a:prstDash val="solid"/>
+                      <a:round/>
+                      <a:headEnd type="none" w="med" len="med"/>
+                      <a:tailEnd type="none" w="med" len="med"/>
+                    </a:lnT>
+                    <a:lnB w="6350" cap="flat" cmpd="sng" algn="ctr">
+                      <a:solidFill>
+                        <a:srgbClr val="E5E8F0"/>
+                      </a:solidFill>
+                      <a:prstDash val="solid"/>
+                      <a:round/>
+                      <a:headEnd type="none" w="med" len="med"/>
+                      <a:tailEnd type="none" w="med" len="med"/>
+                    </a:lnB>
+                    <a:solidFill>
+                      <a:srgbClr val="F7F9FC"/>
+                    </a:solidFill>
+                  </a:tcPr>
+                </a:tc>
+                <a:tc>
+                  <a:txBody>
+                    <a:bodyPr/>
+                    <a:lstStyle/>
+                    <a:p>
+                      <a:pPr rtl="1" algn="ctr" indent="0" marL="0">
+                        <a:buNone/>
+                      </a:pPr>
+                      <a:r>
+                        <a:rPr lang="fa-IR" sz="1200" dirty="0">
+                          <a:solidFill>
+                            <a:srgbClr val="1B1B2F"/>
+                          </a:solidFill>
+                          <a:latin typeface="Calibri" pitchFamily="34" charset="0"/>
+                          <a:ea typeface="Calibri" pitchFamily="34" charset="-122"/>
+                          <a:cs typeface="Calibri" pitchFamily="34" charset="-120"/>
+                        </a:rPr>
+                        <a:t>نیازمند تصمیم — برنامه‌ی تقاضای قابل‌اندازه‌گیری تعریف نشده؛ بند E01 ممیزی</a:t>
+                      </a:r>
+                      <a:endParaRPr lang="fa-IR" sz="1200" dirty="0">
+                        <a:latin typeface="Calibri" charset="0"/>
+                        <a:ea typeface="Calibri" charset="0"/>
+                        <a:cs typeface="Calibri" charset="0"/>
+                      </a:endParaRPr>
+                    </a:p>
+                  </a:txBody>
+                  <a:tcPr marL="91440" marR="91440" marT="45720" marB="45720" anchor="ctr">
+                    <a:lnL w="6350" cap="flat" cmpd="sng" algn="ctr">
+                      <a:solidFill>
+                        <a:srgbClr val="E5E8F0"/>
+                      </a:solidFill>
+                      <a:prstDash val="solid"/>
+                      <a:round/>
+                      <a:headEnd type="none" w="med" len="med"/>
+                      <a:tailEnd type="none" w="med" len="med"/>
+                    </a:lnL>
+                    <a:lnR w="6350" cap="flat" cmpd="sng" algn="ctr">
+                      <a:solidFill>
+                        <a:srgbClr val="E5E8F0"/>
+                      </a:solidFill>
+                      <a:prstDash val="solid"/>
+                      <a:round/>
+                      <a:headEnd type="none" w="med" len="med"/>
+                      <a:tailEnd type="none" w="med" len="med"/>
+                    </a:lnR>
+                    <a:lnT w="6350" cap="flat" cmpd="sng" algn="ctr">
+                      <a:solidFill>
+                        <a:srgbClr val="E5E8F0"/>
+                      </a:solidFill>
+                      <a:prstDash val="solid"/>
+                      <a:round/>
+                      <a:headEnd type="none" w="med" len="med"/>
+                      <a:tailEnd type="none" w="med" len="med"/>
+                    </a:lnT>
+                    <a:lnB w="6350" cap="flat" cmpd="sng" algn="ctr">
+                      <a:solidFill>
+                        <a:srgbClr val="E5E8F0"/>
+                      </a:solidFill>
+                      <a:prstDash val="solid"/>
+                      <a:round/>
+                      <a:headEnd type="none" w="med" len="med"/>
+                      <a:tailEnd type="none" w="med" len="med"/>
+                    </a:lnB>
+                    <a:solidFill>
+                      <a:srgbClr val="F7F9FC"/>
+                    </a:solidFill>
+                  </a:tcPr>
+                </a:tc>
+              </a:tr>
+              <a:tr h="666206">
+                <a:tc>
+                  <a:txBody>
+                    <a:bodyPr/>
+                    <a:lstStyle/>
+                    <a:p>
+                      <a:pPr rtl="1" algn="r" indent="0" marL="0">
+                        <a:buNone/>
+                      </a:pPr>
+                      <a:r>
+                        <a:rPr lang="fa-IR" sz="1200" dirty="0">
+                          <a:solidFill>
+                            <a:srgbClr val="1B1B2F"/>
+                          </a:solidFill>
+                          <a:latin typeface="Calibri" pitchFamily="34" charset="0"/>
+                          <a:ea typeface="Calibri" pitchFamily="34" charset="-122"/>
+                          <a:cs typeface="Calibri" pitchFamily="34" charset="-120"/>
+                        </a:rPr>
+                        <a:t>سرمایه و عرضه‌ی قابل‌قفل</a:t>
+                      </a:r>
+                      <a:endParaRPr lang="fa-IR" sz="1200" dirty="0">
+                        <a:latin typeface="Calibri" charset="0"/>
+                        <a:ea typeface="Calibri" charset="0"/>
+                        <a:cs typeface="Calibri" charset="0"/>
+                      </a:endParaRPr>
+                    </a:p>
+                  </a:txBody>
+                  <a:tcPr marL="91440" marR="91440" marT="45720" marB="45720" anchor="ctr">
+                    <a:lnL w="6350" cap="flat" cmpd="sng" algn="ctr">
+                      <a:solidFill>
+                        <a:srgbClr val="E5E8F0"/>
+                      </a:solidFill>
+                      <a:prstDash val="solid"/>
+                      <a:round/>
+                      <a:headEnd type="none" w="med" len="med"/>
+                      <a:tailEnd type="none" w="med" len="med"/>
+                    </a:lnL>
+                    <a:lnR w="6350" cap="flat" cmpd="sng" algn="ctr">
+                      <a:solidFill>
+                        <a:srgbClr val="E5E8F0"/>
+                      </a:solidFill>
+                      <a:prstDash val="solid"/>
+                      <a:round/>
+                      <a:headEnd type="none" w="med" len="med"/>
+                      <a:tailEnd type="none" w="med" len="med"/>
+                    </a:lnR>
+                    <a:lnT w="6350" cap="flat" cmpd="sng" algn="ctr">
+                      <a:solidFill>
+                        <a:srgbClr val="E5E8F0"/>
+                      </a:solidFill>
+                      <a:prstDash val="solid"/>
+                      <a:round/>
+                      <a:headEnd type="none" w="med" len="med"/>
+                      <a:tailEnd type="none" w="med" len="med"/>
+                    </a:lnT>
+                    <a:lnB w="6350" cap="flat" cmpd="sng" algn="ctr">
+                      <a:solidFill>
+                        <a:srgbClr val="E5E8F0"/>
+                      </a:solidFill>
+                      <a:prstDash val="solid"/>
+                      <a:round/>
+                      <a:headEnd type="none" w="med" len="med"/>
+                      <a:tailEnd type="none" w="med" len="med"/>
+                    </a:lnB>
+                    <a:solidFill>
+                      <a:srgbClr val="FFFFFF"/>
+                    </a:solidFill>
+                  </a:tcPr>
+                </a:tc>
+                <a:tc>
+                  <a:txBody>
+                    <a:bodyPr/>
+                    <a:lstStyle/>
+                    <a:p>
+                      <a:pPr rtl="1" algn="ctr" indent="0" marL="0">
+                        <a:buNone/>
+                      </a:pPr>
+                      <a:r>
+                        <a:rPr lang="fa-IR" sz="1200" dirty="0">
+                          <a:solidFill>
+                            <a:srgbClr val="1B1B2F"/>
+                          </a:solidFill>
+                          <a:latin typeface="Calibri" pitchFamily="34" charset="0"/>
+                          <a:ea typeface="Calibri" pitchFamily="34" charset="-122"/>
+                          <a:cs typeface="Calibri" pitchFamily="34" charset="-120"/>
+                        </a:rPr>
+                        <a:t>نیازمند تصمیم — هدف رشد با وثیقه و عرضه تطبیق نشده؛ بند E02 ممیزی</a:t>
+                      </a:r>
+                      <a:endParaRPr lang="fa-IR" sz="1200" dirty="0">
+                        <a:latin typeface="Calibri" charset="0"/>
+                        <a:ea typeface="Calibri" charset="0"/>
+                        <a:cs typeface="Calibri" charset="0"/>
+                      </a:endParaRPr>
+                    </a:p>
+                  </a:txBody>
+                  <a:tcPr marL="91440" marR="91440" marT="45720" marB="45720" anchor="ctr">
+                    <a:lnL w="6350" cap="flat" cmpd="sng" algn="ctr">
+                      <a:solidFill>
+                        <a:srgbClr val="E5E8F0"/>
+                      </a:solidFill>
+                      <a:prstDash val="solid"/>
+                      <a:round/>
+                      <a:headEnd type="none" w="med" len="med"/>
+                      <a:tailEnd type="none" w="med" len="med"/>
+                    </a:lnL>
+                    <a:lnR w="6350" cap="flat" cmpd="sng" algn="ctr">
+                      <a:solidFill>
+                        <a:srgbClr val="E5E8F0"/>
+                      </a:solidFill>
+                      <a:prstDash val="solid"/>
+                      <a:round/>
+                      <a:headEnd type="none" w="med" len="med"/>
+                      <a:tailEnd type="none" w="med" len="med"/>
+                    </a:lnR>
+                    <a:lnT w="6350" cap="flat" cmpd="sng" algn="ctr">
+                      <a:solidFill>
+                        <a:srgbClr val="E5E8F0"/>
+                      </a:solidFill>
+                      <a:prstDash val="solid"/>
+                      <a:round/>
+                      <a:headEnd type="none" w="med" len="med"/>
+                      <a:tailEnd type="none" w="med" len="med"/>
+                    </a:lnT>
+                    <a:lnB w="6350" cap="flat" cmpd="sng" algn="ctr">
+                      <a:solidFill>
+                        <a:srgbClr val="E5E8F0"/>
+                      </a:solidFill>
+                      <a:prstDash val="solid"/>
+                      <a:round/>
+                      <a:headEnd type="none" w="med" len="med"/>
+                      <a:tailEnd type="none" w="med" len="med"/>
+                    </a:lnB>
+                    <a:solidFill>
+                      <a:srgbClr val="FFFFFF"/>
+                    </a:solidFill>
+                  </a:tcPr>
+                </a:tc>
+              </a:tr>
+              <a:tr h="666206">
+                <a:tc>
+                  <a:txBody>
+                    <a:bodyPr/>
+                    <a:lstStyle/>
+                    <a:p>
+                      <a:pPr rtl="1" algn="r" indent="0" marL="0">
+                        <a:buNone/>
+                      </a:pPr>
+                      <a:r>
+                        <a:rPr lang="fa-IR" sz="1200" dirty="0">
+                          <a:solidFill>
+                            <a:srgbClr val="1B1B2F"/>
+                          </a:solidFill>
+                          <a:latin typeface="Calibri" pitchFamily="34" charset="0"/>
+                          <a:ea typeface="Calibri" pitchFamily="34" charset="-122"/>
+                          <a:cs typeface="Calibri" pitchFamily="34" charset="-120"/>
+                        </a:rPr>
+                        <a:t>شواهد آزمون</a:t>
+                      </a:r>
+                      <a:endParaRPr lang="fa-IR" sz="1200" dirty="0">
+                        <a:latin typeface="Calibri" charset="0"/>
+                        <a:ea typeface="Calibri" charset="0"/>
+                        <a:cs typeface="Calibri" charset="0"/>
+                      </a:endParaRPr>
+                    </a:p>
+                  </a:txBody>
+                  <a:tcPr marL="91440" marR="91440" marT="45720" marB="45720" anchor="ctr">
+                    <a:lnL w="6350" cap="flat" cmpd="sng" algn="ctr">
+                      <a:solidFill>
+                        <a:srgbClr val="E5E8F0"/>
+                      </a:solidFill>
+                      <a:prstDash val="solid"/>
+                      <a:round/>
+                      <a:headEnd type="none" w="med" len="med"/>
+                      <a:tailEnd type="none" w="med" len="med"/>
+                    </a:lnL>
+                    <a:lnR w="6350" cap="flat" cmpd="sng" algn="ctr">
+                      <a:solidFill>
+                        <a:srgbClr val="E5E8F0"/>
+                      </a:solidFill>
+                      <a:prstDash val="solid"/>
+                      <a:round/>
+                      <a:headEnd type="none" w="med" len="med"/>
+                      <a:tailEnd type="none" w="med" len="med"/>
+                    </a:lnR>
+                    <a:lnT w="6350" cap="flat" cmpd="sng" algn="ctr">
+                      <a:solidFill>
+                        <a:srgbClr val="E5E8F0"/>
+                      </a:solidFill>
+                      <a:prstDash val="solid"/>
+                      <a:round/>
+                      <a:headEnd type="none" w="med" len="med"/>
+                      <a:tailEnd type="none" w="med" len="med"/>
+                    </a:lnT>
+                    <a:lnB w="6350" cap="flat" cmpd="sng" algn="ctr">
+                      <a:solidFill>
+                        <a:srgbClr val="E5E8F0"/>
+                      </a:solidFill>
+                      <a:prstDash val="solid"/>
+                      <a:round/>
+                      <a:headEnd type="none" w="med" len="med"/>
+                      <a:tailEnd type="none" w="med" len="med"/>
+                    </a:lnB>
+                    <a:solidFill>
+                      <a:srgbClr val="F7F9FC"/>
+                    </a:solidFill>
+                  </a:tcPr>
+                </a:tc>
+                <a:tc>
+                  <a:txBody>
+                    <a:bodyPr/>
+                    <a:lstStyle/>
+                    <a:p>
+                      <a:pPr rtl="1" algn="ctr" indent="0" marL="0">
+                        <a:buNone/>
+                      </a:pPr>
+                      <a:r>
+                        <a:rPr lang="fa-IR" sz="1200" dirty="0">
+                          <a:solidFill>
+                            <a:srgbClr val="1B1B2F"/>
+                          </a:solidFill>
+                          <a:latin typeface="Calibri" pitchFamily="34" charset="0"/>
+                          <a:ea typeface="Calibri" pitchFamily="34" charset="-122"/>
+                          <a:cs typeface="Calibri" pitchFamily="34" charset="-120"/>
+                        </a:rPr>
+                        <a:t>کد فعلی فقط روی Hardhat آزموده شده؛ اجرای Besu باز است</a:t>
+                      </a:r>
+                      <a:endParaRPr lang="fa-IR" sz="1200" dirty="0">
+                        <a:latin typeface="Calibri" charset="0"/>
+                        <a:ea typeface="Calibri" charset="0"/>
+                        <a:cs typeface="Calibri" charset="0"/>
+                      </a:endParaRPr>
+                    </a:p>
+                  </a:txBody>
+                  <a:tcPr marL="91440" marR="91440" marT="45720" marB="45720" anchor="ctr">
+                    <a:lnL w="6350" cap="flat" cmpd="sng" algn="ctr">
+                      <a:solidFill>
+                        <a:srgbClr val="E5E8F0"/>
+                      </a:solidFill>
+                      <a:prstDash val="solid"/>
+                      <a:round/>
+                      <a:headEnd type="none" w="med" len="med"/>
+                      <a:tailEnd type="none" w="med" len="med"/>
+                    </a:lnL>
+                    <a:lnR w="6350" cap="flat" cmpd="sng" algn="ctr">
+                      <a:solidFill>
+                        <a:srgbClr val="E5E8F0"/>
+                      </a:solidFill>
+                      <a:prstDash val="solid"/>
+                      <a:round/>
+                      <a:headEnd type="none" w="med" len="med"/>
+                      <a:tailEnd type="none" w="med" len="med"/>
+                    </a:lnR>
+                    <a:lnT w="6350" cap="flat" cmpd="sng" algn="ctr">
+                      <a:solidFill>
+                        <a:srgbClr val="E5E8F0"/>
+                      </a:solidFill>
+                      <a:prstDash val="solid"/>
+                      <a:round/>
+                      <a:headEnd type="none" w="med" len="med"/>
+                      <a:tailEnd type="none" w="med" len="med"/>
+                    </a:lnT>
+                    <a:lnB w="6350" cap="flat" cmpd="sng" algn="ctr">
+                      <a:solidFill>
+                        <a:srgbClr val="E5E8F0"/>
+                      </a:solidFill>
+                      <a:prstDash val="solid"/>
+                      <a:round/>
+                      <a:headEnd type="none" w="med" len="med"/>
+                      <a:tailEnd type="none" w="med" len="med"/>
+                    </a:lnB>
+                    <a:solidFill>
+                      <a:srgbClr val="F7F9FC"/>
+                    </a:solidFill>
+                  </a:tcPr>
+                </a:tc>
+              </a:tr>
+            </a:tbl>
+          </a:graphicData>
+        </a:graphic>
+      </p:graphicFrame>
+      <p:sp>
+        <p:nvSpPr>
+          <p:cNvPr id="5" name="Shape 2"/>
+          <p:cNvSpPr/>
+          <p:nvPr/>
+        </p:nvSpPr>
+        <p:spPr>
+          <a:xfrm>
+            <a:off x="429768" y="6446520"/>
+            <a:ext cx="310896" cy="310896"/>
+          </a:xfrm>
+          <a:prstGeom prst="ellipse">
+            <a:avLst/>
+          </a:prstGeom>
+          <a:solidFill>
+            <a:srgbClr val="FFFFFF"/>
+          </a:solidFill>
+          <a:ln/>
+        </p:spPr>
+        <p:txBody>
+          <a:bodyPr/>
+          <a:p/>
+        </p:txBody>
+      </p:sp>
+      <p:pic>
+        <p:nvPicPr>
+          <p:cNvPr id="6" name="Image 0" descr="/home/claude/deck1/assets/logo.png">    </p:cNvPr>
+          <p:cNvPicPr>
+            <a:picLocks noChangeAspect="1"/>
+          </p:cNvPicPr>
+          <p:nvPr/>
+        </p:nvPicPr>
+        <p:blipFill>
+          <a:blip r:embed="rId1"/>
+          <a:stretch>
+            <a:fillRect/>
+          </a:stretch>
+        </p:blipFill>
+        <p:spPr>
+          <a:xfrm>
+            <a:off x="457200" y="6473952"/>
+            <a:ext cx="256032" cy="256032"/>
+          </a:xfrm>
+          <a:prstGeom prst="rect">
+            <a:avLst/>
+          </a:prstGeom>
+        </p:spPr>
+      </p:pic>
+      <p:sp>
+        <p:nvSpPr>
+          <p:cNvPr id="7" name="Text 3"/>
+          <p:cNvSpPr txBox="1"/>
+          <p:nvPr/>
+        </p:nvSpPr>
+        <p:spPr>
+          <a:xfrm>
+            <a:off x="804672" y="6537960"/>
+            <a:ext cx="6949440" cy="274320"/>
+          </a:xfrm>
+          <a:prstGeom prst="rect">
+            <a:avLst/>
+          </a:prstGeom>
+          <a:noFill/>
+          <a:ln/>
+        </p:spPr>
+        <p:txBody>
+          <a:bodyPr wrap="square" lIns="0" tIns="0" rIns="0" bIns="0" rtlCol="0" anchor="ctr"/>
+          <a:lstStyle/>
+          <a:p>
+            <a:pPr rtl="1" algn="r" indent="0" marL="0">
+              <a:buNone/>
+            </a:pPr>
+            <a:r>
+              <a:rPr lang="fa-IR" sz="1000" dirty="0">
+                <a:solidFill>
+                  <a:srgbClr val="8B93B0"/>
+                </a:solidFill>
+                <a:latin typeface="Calibri" pitchFamily="34" charset="0"/>
+                <a:ea typeface="Calibri" pitchFamily="34" charset="-122"/>
+                <a:cs typeface="Calibri" pitchFamily="34" charset="-120"/>
+              </a:rPr>
+              <a:t>بلاک‌چین سور — ارائه به هیأت‌مدیره‌ی بنیاد</a:t>
+            </a:r>
+            <a:endParaRPr lang="fa-IR" sz="1000" dirty="0"/>
+          </a:p>
+        </p:txBody>
+      </p:sp>
+      <p:sp>
+        <p:nvSpPr>
+          <p:cNvPr id="8" name="Text 4"/>
+          <p:cNvSpPr txBox="1"/>
+          <p:nvPr/>
+        </p:nvSpPr>
+        <p:spPr>
+          <a:xfrm>
+            <a:off x="11430000" y="6537960"/>
+            <a:ext cx="365760" cy="274320"/>
+          </a:xfrm>
+          <a:prstGeom prst="rect">
+            <a:avLst/>
+          </a:prstGeom>
+          <a:noFill/>
+          <a:ln/>
+        </p:spPr>
+        <p:txBody>
+          <a:bodyPr wrap="square" lIns="0" tIns="0" rIns="0" bIns="0" rtlCol="0" anchor="ctr"/>
+          <a:lstStyle/>
+          <a:p>
+            <a:pPr rtl="1" algn="r" indent="0" marL="0">
+              <a:buNone/>
+            </a:pPr>
+            <a:r>
+              <a:rPr lang="fa-IR" sz="1000" dirty="0">
+                <a:solidFill>
+                  <a:srgbClr val="8B93B0"/>
+                </a:solidFill>
+                <a:latin typeface="Calibri" pitchFamily="34" charset="0"/>
+                <a:ea typeface="Calibri" pitchFamily="34" charset="-122"/>
+                <a:cs typeface="Calibri" pitchFamily="34" charset="-120"/>
+              </a:rPr>
+              <a:t>34</a:t>
+            </a:r>
+            <a:endParaRPr lang="fa-IR" sz="1000" dirty="0"/>
           </a:p>
         </p:txBody>
       </p:sp>
